--- a/lessons/6-1/slides.pptx
+++ b/lessons/6-1/slides.pptx
@@ -10925,7 +10925,7 @@
       </p:sp>
       <p:sp>
         <p:nvSpPr>
-          <p:cNvPr id="20" name="Shape 18"/>
+          <p:cNvPr id="20" name="Text 18"/>
           <p:cNvSpPr/>
           <p:nvPr/>
         </p:nvSpPr>
@@ -10946,33 +10946,7 @@
             <a:solidFill>
               <a:srgbClr val="D6DBDF"/>
             </a:solidFill>
-            <a:prstDash val="solid"/>
           </a:ln>
-          <a:effectLst>
-            <a:outerShdw sx="100000" sy="100000" kx="0" ky="0" algn="bl" rotWithShape="0" blurRad="50800" dist="12700" dir="5400000">
-              <a:srgbClr val="1C2E42">
-                <a:alpha val="10000"/>
-              </a:srgbClr>
-            </a:outerShdw>
-          </a:effectLst>
-        </p:spPr>
-      </p:sp>
-      <p:sp>
-        <p:nvSpPr>
-          <p:cNvPr id="21" name="Text 19"/>
-          <p:cNvSpPr/>
-          <p:nvPr/>
-        </p:nvSpPr>
-        <p:spPr>
-          <a:xfrm>
-            <a:off x="685800" y="1481328"/>
-            <a:ext cx="1447800" cy="384048"/>
-          </a:xfrm>
-          <a:prstGeom prst="rect">
-            <a:avLst/>
-          </a:prstGeom>
-          <a:noFill/>
-          <a:ln/>
         </p:spPr>
         <p:txBody>
           <a:bodyPr wrap="square" rtlCol="0" anchor="ctr"/>
@@ -10982,7 +10956,7 @@
               <a:buNone/>
             </a:pPr>
             <a:r>
-              <a:rPr lang="en-US" sz="900" dirty="0">
+              <a:rPr lang="en-US" sz="900" b="1" dirty="0">
                 <a:solidFill>
                   <a:srgbClr val="17324D"/>
                 </a:solidFill>
@@ -10998,7 +10972,7 @@
       </p:sp>
       <p:sp>
         <p:nvSpPr>
-          <p:cNvPr id="22" name="Shape 20"/>
+          <p:cNvPr id="21" name="Text 19"/>
           <p:cNvSpPr/>
           <p:nvPr/>
         </p:nvSpPr>
@@ -11019,33 +10993,7 @@
             <a:solidFill>
               <a:srgbClr val="D6DBDF"/>
             </a:solidFill>
-            <a:prstDash val="solid"/>
           </a:ln>
-          <a:effectLst>
-            <a:outerShdw sx="100000" sy="100000" kx="0" ky="0" algn="bl" rotWithShape="0" blurRad="50800" dist="12700" dir="5400000">
-              <a:srgbClr val="1C2E42">
-                <a:alpha val="10000"/>
-              </a:srgbClr>
-            </a:outerShdw>
-          </a:effectLst>
-        </p:spPr>
-      </p:sp>
-      <p:sp>
-        <p:nvSpPr>
-          <p:cNvPr id="23" name="Text 21"/>
-          <p:cNvSpPr/>
-          <p:nvPr/>
-        </p:nvSpPr>
-        <p:spPr>
-          <a:xfrm>
-            <a:off x="2453640" y="1481328"/>
-            <a:ext cx="1447800" cy="384048"/>
-          </a:xfrm>
-          <a:prstGeom prst="rect">
-            <a:avLst/>
-          </a:prstGeom>
-          <a:noFill/>
-          <a:ln/>
         </p:spPr>
         <p:txBody>
           <a:bodyPr wrap="square" rtlCol="0" anchor="ctr"/>
@@ -11055,7 +11003,7 @@
               <a:buNone/>
             </a:pPr>
             <a:r>
-              <a:rPr lang="en-US" sz="900" dirty="0">
+              <a:rPr lang="en-US" sz="900" b="1" dirty="0">
                 <a:solidFill>
                   <a:srgbClr val="17324D"/>
                 </a:solidFill>
@@ -11071,7 +11019,7 @@
       </p:sp>
       <p:sp>
         <p:nvSpPr>
-          <p:cNvPr id="24" name="Shape 22"/>
+          <p:cNvPr id="22" name="Text 20"/>
           <p:cNvSpPr/>
           <p:nvPr/>
         </p:nvSpPr>
@@ -11092,33 +11040,7 @@
             <a:solidFill>
               <a:srgbClr val="D6DBDF"/>
             </a:solidFill>
-            <a:prstDash val="solid"/>
           </a:ln>
-          <a:effectLst>
-            <a:outerShdw sx="100000" sy="100000" kx="0" ky="0" algn="bl" rotWithShape="0" blurRad="50800" dist="12700" dir="5400000">
-              <a:srgbClr val="1C2E42">
-                <a:alpha val="10000"/>
-              </a:srgbClr>
-            </a:outerShdw>
-          </a:effectLst>
-        </p:spPr>
-      </p:sp>
-      <p:sp>
-        <p:nvSpPr>
-          <p:cNvPr id="25" name="Text 23"/>
-          <p:cNvSpPr/>
-          <p:nvPr/>
-        </p:nvSpPr>
-        <p:spPr>
-          <a:xfrm>
-            <a:off x="4221480" y="1481328"/>
-            <a:ext cx="1447800" cy="384048"/>
-          </a:xfrm>
-          <a:prstGeom prst="rect">
-            <a:avLst/>
-          </a:prstGeom>
-          <a:noFill/>
-          <a:ln/>
         </p:spPr>
         <p:txBody>
           <a:bodyPr wrap="square" rtlCol="0" anchor="ctr"/>
@@ -11128,7 +11050,7 @@
               <a:buNone/>
             </a:pPr>
             <a:r>
-              <a:rPr lang="en-US" sz="900" dirty="0">
+              <a:rPr lang="en-US" sz="900" b="1" dirty="0">
                 <a:solidFill>
                   <a:srgbClr val="17324D"/>
                 </a:solidFill>
@@ -11144,7 +11066,7 @@
       </p:sp>
       <p:sp>
         <p:nvSpPr>
-          <p:cNvPr id="26" name="Shape 24"/>
+          <p:cNvPr id="23" name="Text 21"/>
           <p:cNvSpPr/>
           <p:nvPr/>
         </p:nvSpPr>
@@ -11165,33 +11087,7 @@
             <a:solidFill>
               <a:srgbClr val="D6DBDF"/>
             </a:solidFill>
-            <a:prstDash val="solid"/>
           </a:ln>
-          <a:effectLst>
-            <a:outerShdw sx="100000" sy="100000" kx="0" ky="0" algn="bl" rotWithShape="0" blurRad="50800" dist="12700" dir="5400000">
-              <a:srgbClr val="1C2E42">
-                <a:alpha val="10000"/>
-              </a:srgbClr>
-            </a:outerShdw>
-          </a:effectLst>
-        </p:spPr>
-      </p:sp>
-      <p:sp>
-        <p:nvSpPr>
-          <p:cNvPr id="27" name="Text 25"/>
-          <p:cNvSpPr/>
-          <p:nvPr/>
-        </p:nvSpPr>
-        <p:spPr>
-          <a:xfrm>
-            <a:off x="685800" y="1975104"/>
-            <a:ext cx="1447800" cy="384048"/>
-          </a:xfrm>
-          <a:prstGeom prst="rect">
-            <a:avLst/>
-          </a:prstGeom>
-          <a:noFill/>
-          <a:ln/>
         </p:spPr>
         <p:txBody>
           <a:bodyPr wrap="square" rtlCol="0" anchor="ctr"/>
@@ -11201,7 +11097,7 @@
               <a:buNone/>
             </a:pPr>
             <a:r>
-              <a:rPr lang="en-US" sz="900" dirty="0">
+              <a:rPr lang="en-US" sz="900" b="1" dirty="0">
                 <a:solidFill>
                   <a:srgbClr val="17324D"/>
                 </a:solidFill>
@@ -11217,7 +11113,7 @@
       </p:sp>
       <p:sp>
         <p:nvSpPr>
-          <p:cNvPr id="28" name="Shape 26"/>
+          <p:cNvPr id="24" name="Shape 22"/>
           <p:cNvSpPr/>
           <p:nvPr/>
         </p:nvSpPr>
@@ -11251,7 +11147,7 @@
       </p:sp>
       <p:sp>
         <p:nvSpPr>
-          <p:cNvPr id="29" name="Text 27"/>
+          <p:cNvPr id="25" name="Text 23"/>
           <p:cNvSpPr/>
           <p:nvPr/>
         </p:nvSpPr>
@@ -11292,7 +11188,7 @@
       </p:sp>
       <p:sp>
         <p:nvSpPr>
-          <p:cNvPr id="30" name="Shape 28"/>
+          <p:cNvPr id="26" name="Shape 24"/>
           <p:cNvSpPr/>
           <p:nvPr/>
         </p:nvSpPr>
@@ -11326,7 +11222,7 @@
       </p:sp>
       <p:sp>
         <p:nvSpPr>
-          <p:cNvPr id="31" name="Text 29"/>
+          <p:cNvPr id="27" name="Text 25"/>
           <p:cNvSpPr/>
           <p:nvPr/>
         </p:nvSpPr>
@@ -11367,7 +11263,7 @@
       </p:sp>
       <p:sp>
         <p:nvSpPr>
-          <p:cNvPr id="32" name="Shape 30"/>
+          <p:cNvPr id="28" name="Shape 26"/>
           <p:cNvSpPr/>
           <p:nvPr/>
         </p:nvSpPr>
@@ -11401,7 +11297,7 @@
       </p:sp>
       <p:sp>
         <p:nvSpPr>
-          <p:cNvPr id="33" name="Text 31"/>
+          <p:cNvPr id="29" name="Text 27"/>
           <p:cNvSpPr/>
           <p:nvPr/>
         </p:nvSpPr>
@@ -11442,7 +11338,7 @@
       </p:sp>
       <p:sp>
         <p:nvSpPr>
-          <p:cNvPr id="34" name="Text 32"/>
+          <p:cNvPr id="30" name="Text 28"/>
           <p:cNvSpPr/>
           <p:nvPr/>
         </p:nvSpPr>
@@ -11481,7 +11377,7 @@
       </p:sp>
       <p:sp>
         <p:nvSpPr>
-          <p:cNvPr id="35" name="Shape 33"/>
+          <p:cNvPr id="31" name="Shape 29"/>
           <p:cNvSpPr/>
           <p:nvPr/>
         </p:nvSpPr>
@@ -11504,7 +11400,7 @@
       </p:sp>
       <p:sp>
         <p:nvSpPr>
-          <p:cNvPr id="36" name="Shape 34"/>
+          <p:cNvPr id="32" name="Shape 30"/>
           <p:cNvSpPr/>
           <p:nvPr/>
         </p:nvSpPr>
@@ -11527,7 +11423,7 @@
       </p:sp>
       <p:sp>
         <p:nvSpPr>
-          <p:cNvPr id="37" name="Shape 35"/>
+          <p:cNvPr id="33" name="Shape 31"/>
           <p:cNvSpPr/>
           <p:nvPr/>
         </p:nvSpPr>
@@ -11550,7 +11446,7 @@
       </p:sp>
       <p:sp>
         <p:nvSpPr>
-          <p:cNvPr id="38" name="Shape 36"/>
+          <p:cNvPr id="34" name="Shape 32"/>
           <p:cNvSpPr/>
           <p:nvPr/>
         </p:nvSpPr>
@@ -11573,7 +11469,7 @@
       </p:sp>
       <p:sp>
         <p:nvSpPr>
-          <p:cNvPr id="39" name="Shape 37"/>
+          <p:cNvPr id="35" name="Shape 33"/>
           <p:cNvSpPr/>
           <p:nvPr/>
         </p:nvSpPr>

--- a/lessons/6-1/slides.pptx
+++ b/lessons/6-1/slides.pptx
@@ -2495,7 +2495,7 @@
                 <a:ea typeface="Outfit" pitchFamily="34" charset="-122"/>
                 <a:cs typeface="Outfit" pitchFamily="34" charset="-120"/>
               </a:rPr>
-              <a:t>6.EE.1</a:t>
+              <a:t>6.AT.5</a:t>
             </a:r>
             <a:endParaRPr lang="en-US" sz="1000" dirty="0"/>
           </a:p>
@@ -3218,7 +3218,7 @@
                 <a:ea typeface="Outfit" pitchFamily="34" charset="-122"/>
                 <a:cs typeface="Outfit" pitchFamily="34" charset="-120"/>
               </a:rPr>
-              <a:t>6.EE.1</a:t>
+              <a:t>6.AT.5</a:t>
             </a:r>
             <a:endParaRPr lang="en-US" sz="900" dirty="0"/>
           </a:p>
@@ -4328,7 +4328,7 @@
                 <a:ea typeface="Outfit" pitchFamily="34" charset="-122"/>
                 <a:cs typeface="Outfit" pitchFamily="34" charset="-120"/>
               </a:rPr>
-              <a:t>6.EE.1</a:t>
+              <a:t>6.AT.5</a:t>
             </a:r>
             <a:endParaRPr lang="en-US" sz="900" dirty="0"/>
           </a:p>
@@ -5597,7 +5597,7 @@
                 <a:ea typeface="Outfit" pitchFamily="34" charset="-122"/>
                 <a:cs typeface="Outfit" pitchFamily="34" charset="-120"/>
               </a:rPr>
-              <a:t>6.EE.1</a:t>
+              <a:t>6.AT.5</a:t>
             </a:r>
             <a:endParaRPr lang="en-US" sz="900" dirty="0"/>
           </a:p>
@@ -6891,7 +6891,7 @@
                 <a:ea typeface="Outfit" pitchFamily="34" charset="-122"/>
                 <a:cs typeface="Outfit" pitchFamily="34" charset="-120"/>
               </a:rPr>
-              <a:t>6.EE.1</a:t>
+              <a:t>6.AT.5</a:t>
             </a:r>
             <a:endParaRPr lang="en-US" sz="900" dirty="0"/>
           </a:p>
@@ -7953,7 +7953,7 @@
                 <a:ea typeface="Outfit" pitchFamily="34" charset="-122"/>
                 <a:cs typeface="Outfit" pitchFamily="34" charset="-120"/>
               </a:rPr>
-              <a:t>6.EE.1</a:t>
+              <a:t>6.AT.5</a:t>
             </a:r>
             <a:endParaRPr lang="en-US" sz="900" dirty="0"/>
           </a:p>
@@ -8918,7 +8918,7 @@
                 <a:ea typeface="Outfit" pitchFamily="34" charset="-122"/>
                 <a:cs typeface="Outfit" pitchFamily="34" charset="-120"/>
               </a:rPr>
-              <a:t>6.EE.1</a:t>
+              <a:t>6.AT.5</a:t>
             </a:r>
             <a:endParaRPr lang="en-US" sz="900" dirty="0"/>
           </a:p>
@@ -9835,7 +9835,7 @@
                 <a:ea typeface="Outfit" pitchFamily="34" charset="-122"/>
                 <a:cs typeface="Outfit" pitchFamily="34" charset="-120"/>
               </a:rPr>
-              <a:t>6.EE.1</a:t>
+              <a:t>6.AT.5</a:t>
             </a:r>
             <a:endParaRPr lang="en-US" sz="900" dirty="0"/>
           </a:p>
@@ -10963,7 +10963,7 @@
                 <a:ea typeface="Outfit" pitchFamily="34" charset="-122"/>
                 <a:cs typeface="Outfit" pitchFamily="34" charset="-120"/>
               </a:rPr>
-              <a:t>6.EE.1</a:t>
+              <a:t>6.AT.5</a:t>
             </a:r>
             <a:endParaRPr lang="en-US" sz="900" dirty="0"/>
           </a:p>
@@ -12396,7 +12396,7 @@
                 <a:ea typeface="Outfit" pitchFamily="34" charset="-122"/>
                 <a:cs typeface="Outfit" pitchFamily="34" charset="-120"/>
               </a:rPr>
-              <a:t>6.EE.1</a:t>
+              <a:t>6.AT.5</a:t>
             </a:r>
             <a:endParaRPr lang="en-US" sz="900" dirty="0"/>
           </a:p>
@@ -13210,7 +13210,7 @@
                 <a:ea typeface="Outfit" pitchFamily="34" charset="-122"/>
                 <a:cs typeface="Outfit" pitchFamily="34" charset="-120"/>
               </a:rPr>
-              <a:t>6.EE.1</a:t>
+              <a:t>6.AT.5</a:t>
             </a:r>
             <a:endParaRPr lang="en-US" sz="900" dirty="0"/>
           </a:p>
@@ -14270,7 +14270,7 @@
                 <a:ea typeface="Outfit" pitchFamily="34" charset="-122"/>
                 <a:cs typeface="Outfit" pitchFamily="34" charset="-120"/>
               </a:rPr>
-              <a:t>6.EE.1</a:t>
+              <a:t>6.AT.5</a:t>
             </a:r>
             <a:endParaRPr lang="en-US" sz="900" dirty="0"/>
           </a:p>
@@ -15330,7 +15330,7 @@
                 <a:ea typeface="Outfit" pitchFamily="34" charset="-122"/>
                 <a:cs typeface="Outfit" pitchFamily="34" charset="-120"/>
               </a:rPr>
-              <a:t>6.EE.1</a:t>
+              <a:t>6.AT.5</a:t>
             </a:r>
             <a:endParaRPr lang="en-US" sz="900" dirty="0"/>
           </a:p>
@@ -16390,7 +16390,7 @@
                 <a:ea typeface="Outfit" pitchFamily="34" charset="-122"/>
                 <a:cs typeface="Outfit" pitchFamily="34" charset="-120"/>
               </a:rPr>
-              <a:t>6.EE.1</a:t>
+              <a:t>6.AT.5</a:t>
             </a:r>
             <a:endParaRPr lang="en-US" sz="900" dirty="0"/>
           </a:p>
@@ -17450,7 +17450,7 @@
                 <a:ea typeface="Outfit" pitchFamily="34" charset="-122"/>
                 <a:cs typeface="Outfit" pitchFamily="34" charset="-120"/>
               </a:rPr>
-              <a:t>6.EE.1</a:t>
+              <a:t>6.AT.5</a:t>
             </a:r>
             <a:endParaRPr lang="en-US" sz="900" dirty="0"/>
           </a:p>
@@ -18438,7 +18438,7 @@
                 <a:ea typeface="Outfit" pitchFamily="34" charset="-122"/>
                 <a:cs typeface="Outfit" pitchFamily="34" charset="-120"/>
               </a:rPr>
-              <a:t>6.EE.1</a:t>
+              <a:t>6.AT.5</a:t>
             </a:r>
             <a:endParaRPr lang="en-US" sz="900" dirty="0"/>
           </a:p>
@@ -19951,260 +19951,6 @@
                   </a:tcPr>
                 </a:tc>
               </a:tr>
-              <a:tr h="457200">
-                <a:tc>
-                  <a:txBody>
-                    <a:bodyPr/>
-                    <a:lstStyle/>
-                    <a:p>
-                      <a:pPr indent="0" marL="0">
-                        <a:buNone/>
-                      </a:pPr>
-                      <a:r>
-                        <a:rPr lang="en-US" sz="950" b="1" dirty="0">
-                          <a:solidFill>
-                            <a:srgbClr val="17324D"/>
-                          </a:solidFill>
-                          <a:latin typeface="Hanken Grotesk" pitchFamily="34" charset="0"/>
-                          <a:ea typeface="Hanken Grotesk" pitchFamily="34" charset="-122"/>
-                          <a:cs typeface="Hanken Grotesk" pitchFamily="34" charset="-120"/>
-                        </a:rPr>
-                        <a:t>Coefficient</a:t>
-                      </a:r>
-                      <a:pPr indent="0" marL="0">
-                        <a:buNone/>
-                      </a:pPr>
-                      <a:endParaRPr lang="en-US" sz="950" dirty="0">
-                        <a:latin typeface="Hanken Grotesk" charset="0"/>
-                        <a:ea typeface="Hanken Grotesk" charset="0"/>
-                        <a:cs typeface="Hanken Grotesk" charset="0"/>
-                      </a:endParaRPr>
-                    </a:p>
-                    <a:p>
-                      <a:pPr indent="0" marL="0">
-                        <a:buNone/>
-                      </a:pPr>
-                      <a:r>
-                        <a:rPr lang="en-US" sz="850" i="1" dirty="0">
-                          <a:solidFill>
-                            <a:srgbClr val="8A96A3"/>
-                          </a:solidFill>
-                          <a:latin typeface="Hanken Grotesk" pitchFamily="34" charset="0"/>
-                          <a:ea typeface="Hanken Grotesk" pitchFamily="34" charset="-122"/>
-                          <a:cs typeface="Hanken Grotesk" pitchFamily="34" charset="-120"/>
-                        </a:rPr>
-                        <a:t>Coeficiente</a:t>
-                      </a:r>
-                      <a:endParaRPr lang="en-US" sz="950" dirty="0">
-                        <a:latin typeface="Hanken Grotesk" charset="0"/>
-                        <a:ea typeface="Hanken Grotesk" charset="0"/>
-                        <a:cs typeface="Hanken Grotesk" charset="0"/>
-                      </a:endParaRPr>
-                    </a:p>
-                  </a:txBody>
-                  <a:tcPr marL="91440" marR="91440" marT="45720" marB="45720" anchor="ctr">
-                    <a:lnL w="9525" cap="flat" cmpd="sng" algn="ctr">
-                      <a:solidFill>
-                        <a:srgbClr val="D6DBDF"/>
-                      </a:solidFill>
-                      <a:prstDash val="solid"/>
-                      <a:round/>
-                      <a:headEnd type="none" w="med" len="med"/>
-                      <a:tailEnd type="none" w="med" len="med"/>
-                    </a:lnL>
-                    <a:lnR w="9525" cap="flat" cmpd="sng" algn="ctr">
-                      <a:solidFill>
-                        <a:srgbClr val="D6DBDF"/>
-                      </a:solidFill>
-                      <a:prstDash val="solid"/>
-                      <a:round/>
-                      <a:headEnd type="none" w="med" len="med"/>
-                      <a:tailEnd type="none" w="med" len="med"/>
-                    </a:lnR>
-                    <a:lnT w="9525" cap="flat" cmpd="sng" algn="ctr">
-                      <a:solidFill>
-                        <a:srgbClr val="D6DBDF"/>
-                      </a:solidFill>
-                      <a:prstDash val="solid"/>
-                      <a:round/>
-                      <a:headEnd type="none" w="med" len="med"/>
-                      <a:tailEnd type="none" w="med" len="med"/>
-                    </a:lnT>
-                    <a:lnB w="9525" cap="flat" cmpd="sng" algn="ctr">
-                      <a:solidFill>
-                        <a:srgbClr val="D6DBDF"/>
-                      </a:solidFill>
-                      <a:prstDash val="solid"/>
-                      <a:round/>
-                      <a:headEnd type="none" w="med" len="med"/>
-                      <a:tailEnd type="none" w="med" len="med"/>
-                    </a:lnB>
-                    <a:solidFill>
-                      <a:srgbClr val="FFFFFF"/>
-                    </a:solidFill>
-                  </a:tcPr>
-                </a:tc>
-                <a:tc>
-                  <a:txBody>
-                    <a:bodyPr/>
-                    <a:lstStyle/>
-                    <a:p>
-                      <a:pPr indent="0" marL="0">
-                        <a:buNone/>
-                      </a:pPr>
-                      <a:r>
-                        <a:rPr lang="en-US" sz="900" dirty="0">
-                          <a:solidFill>
-                            <a:srgbClr val="24323F"/>
-                          </a:solidFill>
-                          <a:latin typeface="Hanken Grotesk" pitchFamily="34" charset="0"/>
-                          <a:ea typeface="Hanken Grotesk" pitchFamily="34" charset="-122"/>
-                          <a:cs typeface="Hanken Grotesk" pitchFamily="34" charset="-120"/>
-                        </a:rPr>
-                        <a:t>The number in front of a letter, like the 3 in 3x.</a:t>
-                      </a:r>
-                      <a:pPr indent="0" marL="0">
-                        <a:buNone/>
-                      </a:pPr>
-                      <a:endParaRPr lang="en-US" sz="900" dirty="0">
-                        <a:latin typeface="Hanken Grotesk" charset="0"/>
-                        <a:ea typeface="Hanken Grotesk" charset="0"/>
-                        <a:cs typeface="Hanken Grotesk" charset="0"/>
-                      </a:endParaRPr>
-                    </a:p>
-                    <a:p>
-                      <a:pPr indent="0" marL="0">
-                        <a:buNone/>
-                      </a:pPr>
-                      <a:r>
-                        <a:rPr lang="en-US" sz="850" i="1" dirty="0">
-                          <a:solidFill>
-                            <a:srgbClr val="8A96A3"/>
-                          </a:solidFill>
-                          <a:latin typeface="Hanken Grotesk" pitchFamily="34" charset="0"/>
-                          <a:ea typeface="Hanken Grotesk" pitchFamily="34" charset="-122"/>
-                          <a:cs typeface="Hanken Grotesk" pitchFamily="34" charset="-120"/>
-                        </a:rPr>
-                        <a:t>El número frente a una letra, como el 3 en 3x.</a:t>
-                      </a:r>
-                      <a:endParaRPr lang="en-US" sz="900" dirty="0">
-                        <a:latin typeface="Hanken Grotesk" charset="0"/>
-                        <a:ea typeface="Hanken Grotesk" charset="0"/>
-                        <a:cs typeface="Hanken Grotesk" charset="0"/>
-                      </a:endParaRPr>
-                    </a:p>
-                  </a:txBody>
-                  <a:tcPr marL="91440" marR="91440" marT="45720" marB="45720" anchor="ctr">
-                    <a:lnL w="9525" cap="flat" cmpd="sng" algn="ctr">
-                      <a:solidFill>
-                        <a:srgbClr val="D6DBDF"/>
-                      </a:solidFill>
-                      <a:prstDash val="solid"/>
-                      <a:round/>
-                      <a:headEnd type="none" w="med" len="med"/>
-                      <a:tailEnd type="none" w="med" len="med"/>
-                    </a:lnL>
-                    <a:lnR w="9525" cap="flat" cmpd="sng" algn="ctr">
-                      <a:solidFill>
-                        <a:srgbClr val="D6DBDF"/>
-                      </a:solidFill>
-                      <a:prstDash val="solid"/>
-                      <a:round/>
-                      <a:headEnd type="none" w="med" len="med"/>
-                      <a:tailEnd type="none" w="med" len="med"/>
-                    </a:lnR>
-                    <a:lnT w="9525" cap="flat" cmpd="sng" algn="ctr">
-                      <a:solidFill>
-                        <a:srgbClr val="D6DBDF"/>
-                      </a:solidFill>
-                      <a:prstDash val="solid"/>
-                      <a:round/>
-                      <a:headEnd type="none" w="med" len="med"/>
-                      <a:tailEnd type="none" w="med" len="med"/>
-                    </a:lnT>
-                    <a:lnB w="9525" cap="flat" cmpd="sng" algn="ctr">
-                      <a:solidFill>
-                        <a:srgbClr val="D6DBDF"/>
-                      </a:solidFill>
-                      <a:prstDash val="solid"/>
-                      <a:round/>
-                      <a:headEnd type="none" w="med" len="med"/>
-                      <a:tailEnd type="none" w="med" len="med"/>
-                    </a:lnB>
-                    <a:solidFill>
-                      <a:srgbClr val="FFFFFF"/>
-                    </a:solidFill>
-                  </a:tcPr>
-                </a:tc>
-                <a:tc>
-                  <a:txBody>
-                    <a:bodyPr/>
-                    <a:lstStyle/>
-                    <a:p>
-                      <a:pPr indent="0" marL="0">
-                        <a:buNone/>
-                      </a:pPr>
-                      <a:r>
-                        <a:rPr lang="en-US" sz="900" i="1" dirty="0">
-                          <a:solidFill>
-                            <a:srgbClr val="24323F"/>
-                          </a:solidFill>
-                          <a:latin typeface="Hanken Grotesk" pitchFamily="34" charset="0"/>
-                          <a:ea typeface="Hanken Grotesk" pitchFamily="34" charset="-122"/>
-                          <a:cs typeface="Hanken Grotesk" pitchFamily="34" charset="-120"/>
-                        </a:rPr>
-                        <a:t>In 3x, the 3 is the coefficient — if x = 4, then 3x = 3 × 4 = 12</a:t>
-                      </a:r>
-                      <a:endParaRPr lang="en-US" sz="900" dirty="0">
-                        <a:latin typeface="Hanken Grotesk" charset="0"/>
-                        <a:ea typeface="Hanken Grotesk" charset="0"/>
-                        <a:cs typeface="Hanken Grotesk" charset="0"/>
-                      </a:endParaRPr>
-                    </a:p>
-                  </a:txBody>
-                  <a:tcPr marL="91440" marR="91440" marT="45720" marB="45720" anchor="ctr">
-                    <a:lnL w="9525" cap="flat" cmpd="sng" algn="ctr">
-                      <a:solidFill>
-                        <a:srgbClr val="D6DBDF"/>
-                      </a:solidFill>
-                      <a:prstDash val="solid"/>
-                      <a:round/>
-                      <a:headEnd type="none" w="med" len="med"/>
-                      <a:tailEnd type="none" w="med" len="med"/>
-                    </a:lnL>
-                    <a:lnR w="9525" cap="flat" cmpd="sng" algn="ctr">
-                      <a:solidFill>
-                        <a:srgbClr val="D6DBDF"/>
-                      </a:solidFill>
-                      <a:prstDash val="solid"/>
-                      <a:round/>
-                      <a:headEnd type="none" w="med" len="med"/>
-                      <a:tailEnd type="none" w="med" len="med"/>
-                    </a:lnR>
-                    <a:lnT w="9525" cap="flat" cmpd="sng" algn="ctr">
-                      <a:solidFill>
-                        <a:srgbClr val="D6DBDF"/>
-                      </a:solidFill>
-                      <a:prstDash val="solid"/>
-                      <a:round/>
-                      <a:headEnd type="none" w="med" len="med"/>
-                      <a:tailEnd type="none" w="med" len="med"/>
-                    </a:lnT>
-                    <a:lnB w="9525" cap="flat" cmpd="sng" algn="ctr">
-                      <a:solidFill>
-                        <a:srgbClr val="D6DBDF"/>
-                      </a:solidFill>
-                      <a:prstDash val="solid"/>
-                      <a:round/>
-                      <a:headEnd type="none" w="med" len="med"/>
-                      <a:tailEnd type="none" w="med" len="med"/>
-                    </a:lnB>
-                    <a:solidFill>
-                      <a:srgbClr val="FFFFFF"/>
-                    </a:solidFill>
-                  </a:tcPr>
-                </a:tc>
-              </a:tr>
             </a:tbl>
           </a:graphicData>
         </a:graphic>
@@ -20217,7 +19963,7 @@
         </p:nvSpPr>
         <p:spPr>
           <a:xfrm>
-            <a:off x="411480" y="3520440"/>
+            <a:off x="411480" y="3063240"/>
             <a:ext cx="8412480" cy="237744"/>
           </a:xfrm>
           <a:prstGeom prst="rect">
@@ -20256,7 +20002,7 @@
         </p:nvSpPr>
         <p:spPr>
           <a:xfrm>
-            <a:off x="411480" y="3813048"/>
+            <a:off x="411480" y="3355848"/>
             <a:ext cx="4114800" cy="457200"/>
           </a:xfrm>
           <a:prstGeom prst="roundRect">
@@ -20290,7 +20036,7 @@
         </p:nvSpPr>
         <p:spPr>
           <a:xfrm>
-            <a:off x="521208" y="3813048"/>
+            <a:off x="521208" y="3355848"/>
             <a:ext cx="3895344" cy="457200"/>
           </a:xfrm>
           <a:prstGeom prst="rect">
@@ -20357,7 +20103,7 @@
         </p:nvSpPr>
         <p:spPr>
           <a:xfrm>
-            <a:off x="4663440" y="3813048"/>
+            <a:off x="4663440" y="3355848"/>
             <a:ext cx="4114800" cy="457200"/>
           </a:xfrm>
           <a:prstGeom prst="roundRect">
@@ -20391,7 +20137,7 @@
         </p:nvSpPr>
         <p:spPr>
           <a:xfrm>
-            <a:off x="4773168" y="3813048"/>
+            <a:off x="4773168" y="3355848"/>
             <a:ext cx="3895344" cy="457200"/>
           </a:xfrm>
           <a:prstGeom prst="rect">
@@ -20617,7 +20363,7 @@
                 <a:ea typeface="Outfit" pitchFamily="34" charset="-122"/>
                 <a:cs typeface="Outfit" pitchFamily="34" charset="-120"/>
               </a:rPr>
-              <a:t>6.EE.1</a:t>
+              <a:t>6.AT.5</a:t>
             </a:r>
             <a:endParaRPr lang="en-US" sz="900" dirty="0"/>
           </a:p>

--- a/lessons/6-1/slides.pptx
+++ b/lessons/6-1/slides.pptx
@@ -694,7 +694,7 @@
           <a:p>
             <a:r>
               <a:rPr lang="en-US" dirty="0"/>
-              <a:t>Answer key — 2³ means 2 × 2 × 2, NOT 2 × 3. The exponent tells us to multiply the base by itself 3 times: 2 × 2 × 2 = 8.</a:t>
+              <a:t>Answer key — 4 ÷ 1/5 means 'how many 1/5-size pieces fit into 4,' not '1/5 of 4.' The correct answer is 4 × 5 = 20.</a:t>
             </a:r>
             <a:endParaRPr lang="en-US" dirty="0"/>
           </a:p>
@@ -2334,7 +2334,7 @@
             <a:avLst/>
           </a:prstGeom>
           <a:solidFill>
-            <a:srgbClr val="7A5C8E">
+            <a:srgbClr val="2E7D9A">
               <a:alpha val="35000"/>
             </a:srgbClr>
           </a:solidFill>
@@ -2410,7 +2410,7 @@
                   <a:srgbClr val="000000"/>
                 </a:solidFill>
               </a:rPr>
-              <a:t>🎵</a:t>
+              <a:t>🔍</a:t>
             </a:r>
             <a:endParaRPr lang="en-US" sz="4400" dirty="0"/>
           </a:p>
@@ -2452,7 +2452,7 @@
                 <a:ea typeface="Outfit" pitchFamily="34" charset="-122"/>
                 <a:cs typeface="Outfit" pitchFamily="34" charset="-120"/>
               </a:rPr>
-              <a:t>Powers and Exponents</a:t>
+              <a:t>Interpret Division of Fractions</a:t>
             </a:r>
             <a:endParaRPr lang="en-US" sz="3000" dirty="0"/>
           </a:p>
@@ -2475,7 +2475,7 @@
             </a:avLst>
           </a:prstGeom>
           <a:solidFill>
-            <a:srgbClr val="7A5C8E"/>
+            <a:srgbClr val="2E7D9A"/>
           </a:solidFill>
           <a:ln/>
         </p:spPr>
@@ -2495,7 +2495,7 @@
                 <a:ea typeface="Outfit" pitchFamily="34" charset="-122"/>
                 <a:cs typeface="Outfit" pitchFamily="34" charset="-120"/>
               </a:rPr>
-              <a:t>6.AT.5</a:t>
+              <a:t>6.NOS.1</a:t>
             </a:r>
             <a:endParaRPr lang="en-US" sz="1000" dirty="0"/>
           </a:p>
@@ -2534,7 +2534,7 @@
                 <a:ea typeface="Hanken Grotesk" pitchFamily="34" charset="-122"/>
                 <a:cs typeface="Hanken Grotesk" pitchFamily="34" charset="-120"/>
               </a:rPr>
-              <a:t>Unit 6  ·  Lesson 6-1</a:t>
+              <a:t>Unit 2  ·  Lesson 2-1</a:t>
             </a:r>
             <a:endParaRPr lang="en-US" sz="1000" dirty="0"/>
           </a:p>
@@ -2860,7 +2860,7 @@
             <a:r>
               <a:rPr lang="en-US" sz="1100" b="1" dirty="0">
                 <a:solidFill>
-                  <a:srgbClr val="7A5C8E"/>
+                  <a:srgbClr val="2E7D9A"/>
                 </a:solidFill>
                 <a:latin typeface="Outfit" pitchFamily="34" charset="0"/>
                 <a:ea typeface="Outfit" pitchFamily="34" charset="-122"/>
@@ -2919,7 +2919,7 @@
                 <a:ea typeface="Hanken Grotesk" pitchFamily="34" charset="-122"/>
                 <a:cs typeface="Hanken Grotesk" pitchFamily="34" charset="-120"/>
               </a:rPr>
-              <a:t>I can write and evaluate numbers in exponent form using a base and a power.</a:t>
+              <a:t>I can use models to interpret what it means to divide by a fraction.</a:t>
             </a:r>
             <a:endParaRPr lang="en-US" sz="1100" dirty="0"/>
           </a:p>
@@ -2986,7 +2986,7 @@
             <a:r>
               <a:rPr lang="en-US" sz="1100" b="1" dirty="0">
                 <a:solidFill>
-                  <a:srgbClr val="7A5C8E"/>
+                  <a:srgbClr val="2E7D9A"/>
                 </a:solidFill>
                 <a:latin typeface="Outfit" pitchFamily="34" charset="0"/>
                 <a:ea typeface="Outfit" pitchFamily="34" charset="-122"/>
@@ -3045,7 +3045,7 @@
                 <a:ea typeface="Hanken Grotesk" pitchFamily="34" charset="-122"/>
                 <a:cs typeface="Hanken Grotesk" pitchFamily="34" charset="-120"/>
               </a:rPr>
-              <a:t>I can explain my work using the words exponent, base, power, and evaluate.</a:t>
+              <a:t>I can explain a fraction division using the words dividend, divisor, quotient, reciprocal, and unit fraction.</a:t>
             </a:r>
             <a:endParaRPr lang="en-US" sz="1050" dirty="0"/>
           </a:p>
@@ -3198,7 +3198,7 @@
             </a:avLst>
           </a:prstGeom>
           <a:solidFill>
-            <a:srgbClr val="7A5C8E"/>
+            <a:srgbClr val="2E7D9A"/>
           </a:solidFill>
           <a:ln/>
         </p:spPr>
@@ -3218,7 +3218,7 @@
                 <a:ea typeface="Outfit" pitchFamily="34" charset="-122"/>
                 <a:cs typeface="Outfit" pitchFamily="34" charset="-120"/>
               </a:rPr>
-              <a:t>6.AT.5</a:t>
+              <a:t>6.NOS.1</a:t>
             </a:r>
             <a:endParaRPr lang="en-US" sz="900" dirty="0"/>
           </a:p>
@@ -3437,7 +3437,7 @@
                 <a:ea typeface="Hanken Grotesk" pitchFamily="34" charset="-122"/>
                 <a:cs typeface="Hanken Grotesk" pitchFamily="34" charset="-120"/>
               </a:rPr>
-              <a:t>Reveal Math Grade 6  ·  Unit 6  ·  Lesson 6-1</a:t>
+              <a:t>Reveal Math Grade 6  ·  Unit 2  ·  Lesson 2-1</a:t>
             </a:r>
             <a:endParaRPr lang="en-US" sz="750" dirty="0"/>
           </a:p>
@@ -3549,7 +3549,7 @@
                 <a:ea typeface="Outfit" pitchFamily="34" charset="-122"/>
                 <a:cs typeface="Outfit" pitchFamily="34" charset="-120"/>
               </a:rPr>
-              <a:t>Evaluate each exponential expression. Write the repeated multiplication and find the value.</a:t>
+              <a:t>Use the bar model to see how many 1/4-size pieces fit into 3 wholes.</a:t>
             </a:r>
             <a:endParaRPr lang="en-US" sz="1050" dirty="0"/>
           </a:p>
@@ -3803,7 +3803,7 @@
           </a:solidFill>
           <a:ln w="12700">
             <a:solidFill>
-              <a:srgbClr val="7A5C8E"/>
+              <a:srgbClr val="2E7D9A"/>
             </a:solidFill>
             <a:prstDash val="solid"/>
           </a:ln>
@@ -3831,7 +3831,7 @@
             <a:avLst/>
           </a:prstGeom>
           <a:solidFill>
-            <a:srgbClr val="7A5C8E"/>
+            <a:srgbClr val="2E7D9A"/>
           </a:solidFill>
           <a:ln/>
         </p:spPr>
@@ -3878,7 +3878,7 @@
           </a:solidFill>
           <a:ln w="12700">
             <a:solidFill>
-              <a:srgbClr val="7A5C8E"/>
+              <a:srgbClr val="2E7D9A"/>
             </a:solidFill>
             <a:prstDash val="solid"/>
           </a:ln>
@@ -3906,7 +3906,7 @@
             <a:avLst/>
           </a:prstGeom>
           <a:solidFill>
-            <a:srgbClr val="7A5C8E"/>
+            <a:srgbClr val="2E7D9A"/>
           </a:solidFill>
           <a:ln/>
         </p:spPr>
@@ -4040,7 +4040,7 @@
                 <a:ea typeface="Hanken Grotesk" pitchFamily="34" charset="-122"/>
                 <a:cs typeface="Hanken Grotesk" pitchFamily="34" charset="-120"/>
               </a:rPr>
-              <a:t>Look at the table: when the exponent goes up by 1 (like from 2³ to 2⁴), what happens to the value, and why?</a:t>
+              <a:t>What does 3 ÷ 1/4 actually mean? Show your partner with the bar model.</a:t>
             </a:r>
             <a:endParaRPr lang="en-US" sz="1000" dirty="0"/>
           </a:p>
@@ -4308,7 +4308,7 @@
             </a:avLst>
           </a:prstGeom>
           <a:solidFill>
-            <a:srgbClr val="7A5C8E"/>
+            <a:srgbClr val="2E7D9A"/>
           </a:solidFill>
           <a:ln/>
         </p:spPr>
@@ -4328,7 +4328,7 @@
                 <a:ea typeface="Outfit" pitchFamily="34" charset="-122"/>
                 <a:cs typeface="Outfit" pitchFamily="34" charset="-120"/>
               </a:rPr>
-              <a:t>6.AT.5</a:t>
+              <a:t>6.NOS.1</a:t>
             </a:r>
             <a:endParaRPr lang="en-US" sz="900" dirty="0"/>
           </a:p>
@@ -4547,7 +4547,7 @@
                 <a:ea typeface="Hanken Grotesk" pitchFamily="34" charset="-122"/>
                 <a:cs typeface="Hanken Grotesk" pitchFamily="34" charset="-120"/>
               </a:rPr>
-              <a:t>Reveal Math Grade 6  ·  Unit 6  ·  Lesson 6-1</a:t>
+              <a:t>Reveal Math Grade 6  ·  Unit 2  ·  Lesson 2-1</a:t>
             </a:r>
             <a:endParaRPr lang="en-US" sz="750" dirty="0"/>
           </a:p>
@@ -4702,7 +4702,7 @@
                 <a:ea typeface="Outfit" pitchFamily="34" charset="-122"/>
                 <a:cs typeface="Outfit" pitchFamily="34" charset="-120"/>
               </a:rPr>
-              <a:t>Find the Exponent Error</a:t>
+              <a:t>Find the Interpretation Error</a:t>
             </a:r>
             <a:endParaRPr lang="en-US" sz="1100" dirty="0"/>
           </a:p>
@@ -4867,7 +4867,7 @@
                 <a:ea typeface="Hanken Grotesk" pitchFamily="34" charset="-122"/>
                 <a:cs typeface="Hanken Grotesk" pitchFamily="34" charset="-120"/>
               </a:rPr>
-              <a:t>Expression:  </a:t>
+              <a:t>Problem:  </a:t>
             </a:r>
             <a:pPr indent="0" marL="0">
               <a:buNone/>
@@ -4881,7 +4881,7 @@
                 <a:ea typeface="Courier New" pitchFamily="34" charset="-122"/>
                 <a:cs typeface="Courier New" pitchFamily="34" charset="-120"/>
               </a:rPr>
-              <a:t>2³</a:t>
+              <a:t>Interpret 4 ÷ 1/5</a:t>
             </a:r>
             <a:endParaRPr lang="en-US" sz="950" dirty="0"/>
           </a:p>
@@ -4934,7 +4934,7 @@
                 <a:ea typeface="Hanken Grotesk" pitchFamily="34" charset="-122"/>
                 <a:cs typeface="Hanken Grotesk" pitchFamily="34" charset="-120"/>
               </a:rPr>
-              <a:t>Student's thinking:  </a:t>
+              <a:t>Student says:  </a:t>
             </a:r>
             <a:pPr indent="0" marL="0">
               <a:buNone/>
@@ -4948,7 +4948,7 @@
                 <a:ea typeface="Courier New" pitchFamily="34" charset="-122"/>
                 <a:cs typeface="Courier New" pitchFamily="34" charset="-120"/>
               </a:rPr>
-              <a:t>2 × 3</a:t>
+              <a:t>4 ÷ 1/5 means 1/5 of 4</a:t>
             </a:r>
             <a:endParaRPr lang="en-US" sz="950" dirty="0"/>
           </a:p>
@@ -5001,7 +5001,7 @@
                 <a:ea typeface="Hanken Grotesk" pitchFamily="34" charset="-122"/>
                 <a:cs typeface="Hanken Grotesk" pitchFamily="34" charset="-120"/>
               </a:rPr>
-              <a:t>Calculate:  </a:t>
+              <a:t>Student's answer:  </a:t>
             </a:r>
             <a:pPr indent="0" marL="0">
               <a:buNone/>
@@ -5015,7 +5015,7 @@
                 <a:ea typeface="Courier New" pitchFamily="34" charset="-122"/>
                 <a:cs typeface="Courier New" pitchFamily="34" charset="-120"/>
               </a:rPr>
-              <a:t>= 6</a:t>
+              <a:t>4/5</a:t>
             </a:r>
             <a:endParaRPr lang="en-US" sz="950" dirty="0"/>
           </a:p>
@@ -5577,7 +5577,7 @@
             </a:avLst>
           </a:prstGeom>
           <a:solidFill>
-            <a:srgbClr val="7A5C8E"/>
+            <a:srgbClr val="2E7D9A"/>
           </a:solidFill>
           <a:ln/>
         </p:spPr>
@@ -5597,7 +5597,7 @@
                 <a:ea typeface="Outfit" pitchFamily="34" charset="-122"/>
                 <a:cs typeface="Outfit" pitchFamily="34" charset="-120"/>
               </a:rPr>
-              <a:t>6.AT.5</a:t>
+              <a:t>6.NOS.1</a:t>
             </a:r>
             <a:endParaRPr lang="en-US" sz="900" dirty="0"/>
           </a:p>
@@ -5816,7 +5816,7 @@
                 <a:ea typeface="Hanken Grotesk" pitchFamily="34" charset="-122"/>
                 <a:cs typeface="Hanken Grotesk" pitchFamily="34" charset="-120"/>
               </a:rPr>
-              <a:t>Reveal Math Grade 6  ·  Unit 6  ·  Lesson 6-1</a:t>
+              <a:t>Reveal Math Grade 6  ·  Unit 2  ·  Lesson 2-1</a:t>
             </a:r>
             <a:endParaRPr lang="en-US" sz="750" dirty="0"/>
           </a:p>
@@ -5951,7 +5951,7 @@
             <a:avLst/>
           </a:prstGeom>
           <a:solidFill>
-            <a:srgbClr val="7A5C8E"/>
+            <a:srgbClr val="2E7D9A"/>
           </a:solidFill>
           <a:ln/>
         </p:spPr>
@@ -6028,7 +6028,7 @@
                 <a:ea typeface="Hanken Grotesk" pitchFamily="34" charset="-122"/>
                 <a:cs typeface="Hanken Grotesk" pitchFamily="34" charset="-120"/>
               </a:rPr>
-              <a:t>I want to find the value of 2³.</a:t>
+              <a:t>I want to cut a 3-foot strip of tape into 1/4-foot pieces. I ask: how many 1/4-foot pieces fit into 3 feet?</a:t>
             </a:r>
             <a:endParaRPr lang="en-US" sz="1050" dirty="0"/>
           </a:p>
@@ -6049,7 +6049,7 @@
             <a:avLst/>
           </a:prstGeom>
           <a:solidFill>
-            <a:srgbClr val="7A5C8E"/>
+            <a:srgbClr val="2E7D9A"/>
           </a:solidFill>
           <a:ln/>
         </p:spPr>
@@ -6126,7 +6126,7 @@
                 <a:ea typeface="Hanken Grotesk" pitchFamily="34" charset="-122"/>
                 <a:cs typeface="Hanken Grotesk" pitchFamily="34" charset="-120"/>
               </a:rPr>
-              <a:t>The small 3 tells me to multiply 2 by itself 3 times.</a:t>
+              <a:t>First I look at just 1 foot. How many 1/4-foot pieces fit in 1 foot? Four, because 4 fourths make one whole.</a:t>
             </a:r>
             <a:endParaRPr lang="en-US" sz="1050" dirty="0"/>
           </a:p>
@@ -6147,7 +6147,7 @@
             <a:avLst/>
           </a:prstGeom>
           <a:solidFill>
-            <a:srgbClr val="7A5C8E"/>
+            <a:srgbClr val="2E7D9A"/>
           </a:solidFill>
           <a:ln/>
         </p:spPr>
@@ -6224,7 +6224,7 @@
                 <a:ea typeface="Hanken Grotesk" pitchFamily="34" charset="-122"/>
                 <a:cs typeface="Hanken Grotesk" pitchFamily="34" charset="-120"/>
               </a:rPr>
-              <a:t>So I write 2 × 2 × 2.</a:t>
+              <a:t>Now I have 3 feet. So I do 3 groups of 4: 3 × 4 = 12.</a:t>
             </a:r>
             <a:endParaRPr lang="en-US" sz="1050" dirty="0"/>
           </a:p>
@@ -6245,7 +6245,7 @@
             <a:avLst/>
           </a:prstGeom>
           <a:solidFill>
-            <a:srgbClr val="7A5C8E"/>
+            <a:srgbClr val="2E7D9A"/>
           </a:solidFill>
           <a:ln/>
         </p:spPr>
@@ -6322,7 +6322,7 @@
                 <a:ea typeface="Hanken Grotesk" pitchFamily="34" charset="-122"/>
                 <a:cs typeface="Hanken Grotesk" pitchFamily="34" charset="-120"/>
               </a:rPr>
-              <a:t>First 2 × 2 = 4. Then 4 × 2 = 8.</a:t>
+              <a:t>So 3 ÷ 1/4 = 12. There are 12 pieces. The answer is bigger than 3 because each piece is very small.</a:t>
             </a:r>
             <a:endParaRPr lang="en-US" sz="1050" dirty="0"/>
           </a:p>
@@ -6331,104 +6331,6 @@
       <p:sp>
         <p:nvSpPr>
           <p:cNvPr id="31" name="Shape 29"/>
-          <p:cNvSpPr/>
-          <p:nvPr/>
-        </p:nvSpPr>
-        <p:spPr>
-          <a:xfrm>
-            <a:off x="594360" y="3145536"/>
-            <a:ext cx="274320" cy="274320"/>
-          </a:xfrm>
-          <a:prstGeom prst="ellipse">
-            <a:avLst/>
-          </a:prstGeom>
-          <a:solidFill>
-            <a:srgbClr val="7A5C8E"/>
-          </a:solidFill>
-          <a:ln/>
-        </p:spPr>
-      </p:sp>
-      <p:sp>
-        <p:nvSpPr>
-          <p:cNvPr id="32" name="Text 30"/>
-          <p:cNvSpPr/>
-          <p:nvPr/>
-        </p:nvSpPr>
-        <p:spPr>
-          <a:xfrm>
-            <a:off x="594360" y="3145536"/>
-            <a:ext cx="274320" cy="274320"/>
-          </a:xfrm>
-          <a:prstGeom prst="rect">
-            <a:avLst/>
-          </a:prstGeom>
-          <a:noFill/>
-          <a:ln/>
-        </p:spPr>
-        <p:txBody>
-          <a:bodyPr wrap="square" rtlCol="0" anchor="ctr"/>
-          <a:lstStyle/>
-          <a:p>
-            <a:pPr algn="ctr" indent="0" marL="0">
-              <a:buNone/>
-            </a:pPr>
-            <a:r>
-              <a:rPr lang="en-US" sz="1100" b="1" dirty="0">
-                <a:solidFill>
-                  <a:srgbClr val="FFFFFF"/>
-                </a:solidFill>
-                <a:latin typeface="Outfit" pitchFamily="34" charset="0"/>
-                <a:ea typeface="Outfit" pitchFamily="34" charset="-122"/>
-                <a:cs typeface="Outfit" pitchFamily="34" charset="-120"/>
-              </a:rPr>
-              <a:t>5</a:t>
-            </a:r>
-            <a:endParaRPr lang="en-US" sz="1100" dirty="0"/>
-          </a:p>
-        </p:txBody>
-      </p:sp>
-      <p:sp>
-        <p:nvSpPr>
-          <p:cNvPr id="33" name="Text 31"/>
-          <p:cNvSpPr/>
-          <p:nvPr/>
-        </p:nvSpPr>
-        <p:spPr>
-          <a:xfrm>
-            <a:off x="978408" y="3090672"/>
-            <a:ext cx="3456432" cy="420624"/>
-          </a:xfrm>
-          <a:prstGeom prst="rect">
-            <a:avLst/>
-          </a:prstGeom>
-          <a:noFill/>
-          <a:ln/>
-        </p:spPr>
-        <p:txBody>
-          <a:bodyPr wrap="square" rtlCol="0" anchor="ctr"/>
-          <a:lstStyle/>
-          <a:p>
-            <a:pPr indent="0" marL="0">
-              <a:buNone/>
-            </a:pPr>
-            <a:r>
-              <a:rPr lang="en-US" sz="1050" dirty="0">
-                <a:solidFill>
-                  <a:srgbClr val="24323F"/>
-                </a:solidFill>
-                <a:latin typeface="Hanken Grotesk" pitchFamily="34" charset="0"/>
-                <a:ea typeface="Hanken Grotesk" pitchFamily="34" charset="-122"/>
-                <a:cs typeface="Hanken Grotesk" pitchFamily="34" charset="-120"/>
-              </a:rPr>
-              <a:t>So 2³ = 8.</a:t>
-            </a:r>
-            <a:endParaRPr lang="en-US" sz="1050" dirty="0"/>
-          </a:p>
-        </p:txBody>
-      </p:sp>
-      <p:sp>
-        <p:nvSpPr>
-          <p:cNvPr id="34" name="Shape 32"/>
           <p:cNvSpPr/>
           <p:nvPr/>
         </p:nvSpPr>
@@ -6462,7 +6364,7 @@
       </p:sp>
       <p:sp>
         <p:nvSpPr>
-          <p:cNvPr id="35" name="Text 33"/>
+          <p:cNvPr id="32" name="Text 30"/>
           <p:cNvSpPr/>
           <p:nvPr/>
         </p:nvSpPr>
@@ -6503,7 +6405,7 @@
       </p:sp>
       <p:sp>
         <p:nvSpPr>
-          <p:cNvPr id="36" name="Text 34"/>
+          <p:cNvPr id="33" name="Text 31"/>
           <p:cNvSpPr/>
           <p:nvPr/>
         </p:nvSpPr>
@@ -6542,7 +6444,7 @@
       </p:sp>
       <p:sp>
         <p:nvSpPr>
-          <p:cNvPr id="37" name="Shape 35"/>
+          <p:cNvPr id="34" name="Shape 32"/>
           <p:cNvSpPr/>
           <p:nvPr/>
         </p:nvSpPr>
@@ -6565,7 +6467,7 @@
       </p:sp>
       <p:sp>
         <p:nvSpPr>
-          <p:cNvPr id="38" name="Shape 36"/>
+          <p:cNvPr id="35" name="Shape 33"/>
           <p:cNvSpPr/>
           <p:nvPr/>
         </p:nvSpPr>
@@ -6588,7 +6490,7 @@
       </p:sp>
       <p:sp>
         <p:nvSpPr>
-          <p:cNvPr id="39" name="Shape 37"/>
+          <p:cNvPr id="36" name="Shape 34"/>
           <p:cNvSpPr/>
           <p:nvPr/>
         </p:nvSpPr>
@@ -6611,7 +6513,7 @@
       </p:sp>
       <p:sp>
         <p:nvSpPr>
-          <p:cNvPr id="40" name="Shape 38"/>
+          <p:cNvPr id="37" name="Shape 35"/>
           <p:cNvSpPr/>
           <p:nvPr/>
         </p:nvSpPr>
@@ -6634,7 +6536,7 @@
       </p:sp>
       <p:sp>
         <p:nvSpPr>
-          <p:cNvPr id="41" name="Shape 39"/>
+          <p:cNvPr id="38" name="Shape 36"/>
           <p:cNvSpPr/>
           <p:nvPr/>
         </p:nvSpPr>
@@ -6657,7 +6559,7 @@
       </p:sp>
       <p:sp>
         <p:nvSpPr>
-          <p:cNvPr id="42" name="Shape 40"/>
+          <p:cNvPr id="39" name="Shape 37"/>
           <p:cNvSpPr/>
           <p:nvPr/>
         </p:nvSpPr>
@@ -6680,7 +6582,7 @@
       </p:sp>
       <p:sp>
         <p:nvSpPr>
-          <p:cNvPr id="43" name="Shape 41"/>
+          <p:cNvPr id="40" name="Shape 38"/>
           <p:cNvSpPr/>
           <p:nvPr/>
         </p:nvSpPr>
@@ -6703,7 +6605,7 @@
       </p:sp>
       <p:sp>
         <p:nvSpPr>
-          <p:cNvPr id="44" name="Shape 42"/>
+          <p:cNvPr id="41" name="Shape 39"/>
           <p:cNvSpPr/>
           <p:nvPr/>
         </p:nvSpPr>
@@ -6871,7 +6773,7 @@
             </a:avLst>
           </a:prstGeom>
           <a:solidFill>
-            <a:srgbClr val="7A5C8E"/>
+            <a:srgbClr val="2E7D9A"/>
           </a:solidFill>
           <a:ln/>
         </p:spPr>
@@ -6891,7 +6793,7 @@
                 <a:ea typeface="Outfit" pitchFamily="34" charset="-122"/>
                 <a:cs typeface="Outfit" pitchFamily="34" charset="-120"/>
               </a:rPr>
-              <a:t>6.AT.5</a:t>
+              <a:t>6.NOS.1</a:t>
             </a:r>
             <a:endParaRPr lang="en-US" sz="900" dirty="0"/>
           </a:p>
@@ -7110,7 +7012,7 @@
                 <a:ea typeface="Hanken Grotesk" pitchFamily="34" charset="-122"/>
                 <a:cs typeface="Hanken Grotesk" pitchFamily="34" charset="-120"/>
               </a:rPr>
-              <a:t>Reveal Math Grade 6  ·  Unit 6  ·  Lesson 6-1</a:t>
+              <a:t>Reveal Math Grade 6  ·  Unit 2  ·  Lesson 2-1</a:t>
             </a:r>
             <a:endParaRPr lang="en-US" sz="750" dirty="0"/>
           </a:p>
@@ -7336,7 +7238,7 @@
                 <a:ea typeface="Hanken Grotesk" pitchFamily="34" charset="-122"/>
                 <a:cs typeface="Hanken Grotesk" pitchFamily="34" charset="-120"/>
               </a:rPr>
-              <a:t>Sketch a model for today's problem. Label it using Exponent and Base.</a:t>
+              <a:t>Sketch a model for today's problem. Label it using Dividend and Divisor.</a:t>
             </a:r>
             <a:endParaRPr lang="en-US" sz="1000" dirty="0"/>
           </a:p>
@@ -7484,7 +7386,7 @@
                 <a:ea typeface="Hanken Grotesk" pitchFamily="34" charset="-122"/>
                 <a:cs typeface="Hanken Grotesk" pitchFamily="34" charset="-120"/>
               </a:rPr>
-              <a:t>In 2–3 sentences, explain "A power like 2³ is a short way to write repeated multiplication: 2 × 2 × 2." in your own words.</a:t>
+              <a:t>In 2–3 sentences, explain "Dividing by a fraction smaller than 1 gives an answer BIGGER than what you started with, because many tiny pieces fit inside." in your own words.</a:t>
             </a:r>
             <a:endParaRPr lang="en-US" sz="1000" dirty="0"/>
           </a:p>
@@ -7780,7 +7682,7 @@
                 <a:ea typeface="Hanken Grotesk" pitchFamily="34" charset="-122"/>
                 <a:cs typeface="Hanken Grotesk" pitchFamily="34" charset="-120"/>
               </a:rPr>
-              <a:t>Write your own problem that uses Exponent, then solve it and make an answer key.</a:t>
+              <a:t>Write your own problem that uses Dividend, then solve it and make an answer key.</a:t>
             </a:r>
             <a:endParaRPr lang="en-US" sz="1000" dirty="0"/>
           </a:p>
@@ -7933,7 +7835,7 @@
             </a:avLst>
           </a:prstGeom>
           <a:solidFill>
-            <a:srgbClr val="7A5C8E"/>
+            <a:srgbClr val="2E7D9A"/>
           </a:solidFill>
           <a:ln/>
         </p:spPr>
@@ -7953,7 +7855,7 @@
                 <a:ea typeface="Outfit" pitchFamily="34" charset="-122"/>
                 <a:cs typeface="Outfit" pitchFamily="34" charset="-120"/>
               </a:rPr>
-              <a:t>6.AT.5</a:t>
+              <a:t>6.NOS.1</a:t>
             </a:r>
             <a:endParaRPr lang="en-US" sz="900" dirty="0"/>
           </a:p>
@@ -8172,7 +8074,7 @@
                 <a:ea typeface="Hanken Grotesk" pitchFamily="34" charset="-122"/>
                 <a:cs typeface="Hanken Grotesk" pitchFamily="34" charset="-120"/>
               </a:rPr>
-              <a:t>Reveal Math Grade 6  ·  Unit 6  ·  Lesson 6-1</a:t>
+              <a:t>Reveal Math Grade 6  ·  Unit 2  ·  Lesson 2-1</a:t>
             </a:r>
             <a:endParaRPr lang="en-US" sz="750" dirty="0"/>
           </a:p>
@@ -8268,7 +8170,7 @@
             </a:avLst>
           </a:prstGeom>
           <a:solidFill>
-            <a:srgbClr val="7A5C8E"/>
+            <a:srgbClr val="2E7D9A"/>
           </a:solidFill>
           <a:ln/>
         </p:spPr>
@@ -8321,7 +8223,7 @@
             <a:r>
               <a:rPr lang="en-US" sz="1050" b="1" dirty="0">
                 <a:solidFill>
-                  <a:srgbClr val="7A5C8E"/>
+                  <a:srgbClr val="2E7D9A"/>
                 </a:solidFill>
                 <a:latin typeface="Hanken Grotesk" pitchFamily="34" charset="0"/>
                 <a:ea typeface="Hanken Grotesk" pitchFamily="34" charset="-122"/>
@@ -8341,7 +8243,7 @@
                 <a:ea typeface="Hanken Grotesk" pitchFamily="34" charset="-122"/>
                 <a:cs typeface="Hanken Grotesk" pitchFamily="34" charset="-120"/>
               </a:rPr>
-              <a:t>What is the value of 4³?</a:t>
+              <a:t>A shelf is 5 feet long. Books are each 1/4 foot wide. How many books fit on the shelf? Which expression represents this?</a:t>
             </a:r>
             <a:endParaRPr lang="en-US" sz="1050" dirty="0"/>
           </a:p>
@@ -8397,7 +8299,7 @@
             <a:r>
               <a:rPr lang="en-US" sz="1050" b="1" dirty="0">
                 <a:solidFill>
-                  <a:srgbClr val="7A5C8E"/>
+                  <a:srgbClr val="2E7D9A"/>
                 </a:solidFill>
                 <a:latin typeface="Hanken Grotesk" pitchFamily="34" charset="0"/>
                 <a:ea typeface="Hanken Grotesk" pitchFamily="34" charset="-122"/>
@@ -8417,7 +8319,7 @@
                 <a:ea typeface="Hanken Grotesk" pitchFamily="34" charset="-122"/>
                 <a:cs typeface="Hanken Grotesk" pitchFamily="34" charset="-120"/>
               </a:rPr>
-              <a:t>What is the value of 6²?</a:t>
+              <a:t>What does 3 ÷ 1/4 mean?</a:t>
             </a:r>
             <a:endParaRPr lang="en-US" sz="1050" dirty="0"/>
           </a:p>
@@ -8473,7 +8375,7 @@
             <a:r>
               <a:rPr lang="en-US" sz="1050" b="1" dirty="0">
                 <a:solidFill>
-                  <a:srgbClr val="7A5C8E"/>
+                  <a:srgbClr val="2E7D9A"/>
                 </a:solidFill>
                 <a:latin typeface="Hanken Grotesk" pitchFamily="34" charset="0"/>
                 <a:ea typeface="Hanken Grotesk" pitchFamily="34" charset="-122"/>
@@ -8493,7 +8395,7 @@
                 <a:ea typeface="Hanken Grotesk" pitchFamily="34" charset="-122"/>
                 <a:cs typeface="Hanken Grotesk" pitchFamily="34" charset="-120"/>
               </a:rPr>
-              <a:t>Which expression shows 5³ as repeated multiplication?</a:t>
+              <a:t>Which expression means 'how many 1/3-size pieces are in 2'?</a:t>
             </a:r>
             <a:endParaRPr lang="en-US" sz="1050" dirty="0"/>
           </a:p>
@@ -8630,7 +8532,7 @@
                 <a:ea typeface="Hanken Grotesk" pitchFamily="34" charset="-122"/>
                 <a:cs typeface="Hanken Grotesk" pitchFamily="34" charset="-120"/>
               </a:rPr>
-              <a:t>Each recording layer doubles the file size, modeled by 4 × 2ⁿ. Why does the file size grow so fast as you add layers?</a:t>
+              <a:t>Where in cooking, sharing, or building might you divide a whole by a fraction?</a:t>
             </a:r>
             <a:endParaRPr lang="en-US" sz="1000" dirty="0"/>
           </a:p>
@@ -8898,7 +8800,7 @@
             </a:avLst>
           </a:prstGeom>
           <a:solidFill>
-            <a:srgbClr val="7A5C8E"/>
+            <a:srgbClr val="2E7D9A"/>
           </a:solidFill>
           <a:ln/>
         </p:spPr>
@@ -8918,7 +8820,7 @@
                 <a:ea typeface="Outfit" pitchFamily="34" charset="-122"/>
                 <a:cs typeface="Outfit" pitchFamily="34" charset="-120"/>
               </a:rPr>
-              <a:t>6.AT.5</a:t>
+              <a:t>6.NOS.1</a:t>
             </a:r>
             <a:endParaRPr lang="en-US" sz="900" dirty="0"/>
           </a:p>
@@ -9137,7 +9039,7 @@
                 <a:ea typeface="Hanken Grotesk" pitchFamily="34" charset="-122"/>
                 <a:cs typeface="Hanken Grotesk" pitchFamily="34" charset="-120"/>
               </a:rPr>
-              <a:t>Reveal Math Grade 6  ·  Unit 6  ·  Lesson 6-1</a:t>
+              <a:t>Reveal Math Grade 6  ·  Unit 2  ·  Lesson 2-1</a:t>
             </a:r>
             <a:endParaRPr lang="en-US" sz="750" dirty="0"/>
           </a:p>
@@ -9296,7 +9198,7 @@
             <a:r>
               <a:rPr lang="en-US" sz="1100" b="1" dirty="0">
                 <a:solidFill>
-                  <a:srgbClr val="7A5C8E"/>
+                  <a:srgbClr val="2E7D9A"/>
                 </a:solidFill>
                 <a:latin typeface="Outfit" pitchFamily="34" charset="0"/>
                 <a:ea typeface="Outfit" pitchFamily="34" charset="-122"/>
@@ -9341,7 +9243,7 @@
                 <a:ea typeface="Hanken Grotesk" pitchFamily="34" charset="-122"/>
                 <a:cs typeface="Hanken Grotesk" pitchFamily="34" charset="-120"/>
               </a:rPr>
-              <a:t>Today's key idea is "A power like 2³ is a short way to write repeated multiplication: 2 × 2 × 2." — and it works because ___.</a:t>
+              <a:t>Today's key idea is "Dividing by a fraction smaller than 1 gives an answer BIGGER than what you started with, because many tiny pieces fit inside." — and it works because ___.</a:t>
             </a:r>
             <a:endParaRPr lang="en-US" sz="1050" dirty="0"/>
           </a:p>
@@ -9445,7 +9347,7 @@
             <a:r>
               <a:rPr lang="en-US" sz="1100" b="1" dirty="0">
                 <a:solidFill>
-                  <a:srgbClr val="7A5C8E"/>
+                  <a:srgbClr val="2E7D9A"/>
                 </a:solidFill>
                 <a:latin typeface="Outfit" pitchFamily="34" charset="0"/>
                 <a:ea typeface="Outfit" pitchFamily="34" charset="-122"/>
@@ -9490,7 +9392,7 @@
                 <a:ea typeface="Hanken Grotesk" pitchFamily="34" charset="-122"/>
                 <a:cs typeface="Hanken Grotesk" pitchFamily="34" charset="-120"/>
               </a:rPr>
-              <a:t>Because Exponent means ___, but a tricky part is ___, so I have to ___.</a:t>
+              <a:t>Because Dividend means ___, but a tricky part is ___, so I have to ___.</a:t>
             </a:r>
             <a:endParaRPr lang="en-US" sz="1050" dirty="0"/>
           </a:p>
@@ -9594,7 +9496,7 @@
             <a:r>
               <a:rPr lang="en-US" sz="1100" b="1" dirty="0">
                 <a:solidFill>
-                  <a:srgbClr val="7A5C8E"/>
+                  <a:srgbClr val="2E7D9A"/>
                 </a:solidFill>
                 <a:latin typeface="Outfit" pitchFamily="34" charset="0"/>
                 <a:ea typeface="Outfit" pitchFamily="34" charset="-122"/>
@@ -9639,7 +9541,7 @@
                 <a:ea typeface="Hanken Grotesk" pitchFamily="34" charset="-122"/>
                 <a:cs typeface="Hanken Grotesk" pitchFamily="34" charset="-120"/>
               </a:rPr>
-              <a:t>A common mistake with Exponent is ___. It happens because ___, and the fix is ___.</a:t>
+              <a:t>A common mistake with Dividend is ___. It happens because ___, and the fix is ___.</a:t>
             </a:r>
             <a:endParaRPr lang="en-US" sz="1050" dirty="0"/>
           </a:p>
@@ -9815,7 +9717,7 @@
             </a:avLst>
           </a:prstGeom>
           <a:solidFill>
-            <a:srgbClr val="7A5C8E"/>
+            <a:srgbClr val="2E7D9A"/>
           </a:solidFill>
           <a:ln/>
         </p:spPr>
@@ -9835,7 +9737,7 @@
                 <a:ea typeface="Outfit" pitchFamily="34" charset="-122"/>
                 <a:cs typeface="Outfit" pitchFamily="34" charset="-120"/>
               </a:rPr>
-              <a:t>6.AT.5</a:t>
+              <a:t>6.NOS.1</a:t>
             </a:r>
             <a:endParaRPr lang="en-US" sz="900" dirty="0"/>
           </a:p>
@@ -10054,7 +9956,7 @@
                 <a:ea typeface="Hanken Grotesk" pitchFamily="34" charset="-122"/>
                 <a:cs typeface="Hanken Grotesk" pitchFamily="34" charset="-120"/>
               </a:rPr>
-              <a:t>Reveal Math Grade 6  ·  Unit 6  ·  Lesson 6-1</a:t>
+              <a:t>Reveal Math Grade 6  ·  Unit 2  ·  Lesson 2-1</a:t>
             </a:r>
             <a:endParaRPr lang="en-US" sz="750" dirty="0"/>
           </a:p>
@@ -10492,7 +10394,7 @@
             <a:r>
               <a:rPr lang="en-US" sz="1050" b="1" dirty="0">
                 <a:solidFill>
-                  <a:srgbClr val="7A5C8E"/>
+                  <a:srgbClr val="2E7D9A"/>
                 </a:solidFill>
                 <a:latin typeface="Hanken Grotesk" pitchFamily="34" charset="0"/>
                 <a:ea typeface="Hanken Grotesk" pitchFamily="34" charset="-122"/>
@@ -10512,7 +10414,7 @@
                 <a:ea typeface="Hanken Grotesk" pitchFamily="34" charset="-122"/>
                 <a:cs typeface="Hanken Grotesk" pitchFamily="34" charset="-120"/>
               </a:rPr>
-              <a:t>What is the value of 3⁴?</a:t>
+              <a:t>What does 5 ÷ 1/4 mean, and what is the quotient?</a:t>
             </a:r>
             <a:endParaRPr lang="en-US" sz="1050" dirty="0"/>
           </a:p>
@@ -10551,7 +10453,7 @@
                 <a:ea typeface="Hanken Grotesk" pitchFamily="34" charset="-122"/>
                 <a:cs typeface="Hanken Grotesk" pitchFamily="34" charset="-120"/>
               </a:rPr>
-              <a:t>A.  81</a:t>
+              <a:t>A.  How many 1/4-size pieces fit into 5; quotient is 20</a:t>
             </a:r>
             <a:endParaRPr lang="en-US" sz="1000" dirty="0"/>
           </a:p>
@@ -10590,7 +10492,7 @@
                 <a:ea typeface="Hanken Grotesk" pitchFamily="34" charset="-122"/>
                 <a:cs typeface="Hanken Grotesk" pitchFamily="34" charset="-120"/>
               </a:rPr>
-              <a:t>B.  12</a:t>
+              <a:t>B.  5 groups of 1/4; quotient is 5/4</a:t>
             </a:r>
             <a:endParaRPr lang="en-US" sz="1000" dirty="0"/>
           </a:p>
@@ -10629,7 +10531,7 @@
                 <a:ea typeface="Hanken Grotesk" pitchFamily="34" charset="-122"/>
                 <a:cs typeface="Hanken Grotesk" pitchFamily="34" charset="-120"/>
               </a:rPr>
-              <a:t>C.  34</a:t>
+              <a:t>C.  1/4 of 5; quotient is 5/4</a:t>
             </a:r>
             <a:endParaRPr lang="en-US" sz="1000" dirty="0"/>
           </a:p>
@@ -10668,7 +10570,7 @@
                 <a:ea typeface="Hanken Grotesk" pitchFamily="34" charset="-122"/>
                 <a:cs typeface="Hanken Grotesk" pitchFamily="34" charset="-120"/>
               </a:rPr>
-              <a:t>D.  64</a:t>
+              <a:t>D.  5 minus 1/4; quotient is 4 3/4</a:t>
             </a:r>
             <a:endParaRPr lang="en-US" sz="1000" dirty="0"/>
           </a:p>
@@ -10701,7 +10603,7 @@
             <a:r>
               <a:rPr lang="en-US" sz="1050" b="1" dirty="0">
                 <a:solidFill>
-                  <a:srgbClr val="7A5C8E"/>
+                  <a:srgbClr val="2E7D9A"/>
                 </a:solidFill>
                 <a:latin typeface="Hanken Grotesk" pitchFamily="34" charset="0"/>
                 <a:ea typeface="Hanken Grotesk" pitchFamily="34" charset="-122"/>
@@ -10943,7 +10845,7 @@
             </a:avLst>
           </a:prstGeom>
           <a:solidFill>
-            <a:srgbClr val="7A5C8E"/>
+            <a:srgbClr val="2E7D9A"/>
           </a:solidFill>
           <a:ln/>
         </p:spPr>
@@ -10963,7 +10865,7 @@
                 <a:ea typeface="Outfit" pitchFamily="34" charset="-122"/>
                 <a:cs typeface="Outfit" pitchFamily="34" charset="-120"/>
               </a:rPr>
-              <a:t>6.AT.5</a:t>
+              <a:t>6.NOS.1</a:t>
             </a:r>
             <a:endParaRPr lang="en-US" sz="900" dirty="0"/>
           </a:p>
@@ -11182,7 +11084,7 @@
                 <a:ea typeface="Hanken Grotesk" pitchFamily="34" charset="-122"/>
                 <a:cs typeface="Hanken Grotesk" pitchFamily="34" charset="-120"/>
               </a:rPr>
-              <a:t>Reveal Math Grade 6  ·  Unit 6  ·  Lesson 6-1</a:t>
+              <a:t>Reveal Math Grade 6  ·  Unit 2  ·  Lesson 2-1</a:t>
             </a:r>
             <a:endParaRPr lang="en-US" sz="750" dirty="0"/>
           </a:p>
@@ -11296,7 +11198,7 @@
                 <a:ea typeface="Hanken Grotesk" pitchFamily="34" charset="-122"/>
                 <a:cs typeface="Hanken Grotesk" pitchFamily="34" charset="-120"/>
               </a:rPr>
-              <a:t>I can write and evaluate numbers in exponent form using a base and a power.</a:t>
+              <a:t>I can use models to interpret what it means to divide by a fraction.</a:t>
             </a:r>
             <a:endParaRPr lang="en-US" sz="1100" dirty="0"/>
           </a:p>
@@ -11351,7 +11253,7 @@
             <a:avLst/>
           </a:prstGeom>
           <a:solidFill>
-            <a:srgbClr val="7A5C8E"/>
+            <a:srgbClr val="2E7D9A"/>
           </a:solidFill>
           <a:ln/>
         </p:spPr>
@@ -11561,7 +11463,7 @@
             <a:avLst/>
           </a:prstGeom>
           <a:solidFill>
-            <a:srgbClr val="7A5C8E"/>
+            <a:srgbClr val="2E7D9A"/>
           </a:solidFill>
           <a:ln/>
         </p:spPr>
@@ -11771,7 +11673,7 @@
             <a:avLst/>
           </a:prstGeom>
           <a:solidFill>
-            <a:srgbClr val="7A5C8E"/>
+            <a:srgbClr val="2E7D9A"/>
           </a:solidFill>
           <a:ln/>
         </p:spPr>
@@ -11981,7 +11883,7 @@
             <a:avLst/>
           </a:prstGeom>
           <a:solidFill>
-            <a:srgbClr val="7A5C8E"/>
+            <a:srgbClr val="2E7D9A"/>
           </a:solidFill>
           <a:ln/>
         </p:spPr>
@@ -12203,7 +12105,7 @@
             <a:r>
               <a:rPr lang="en-US" sz="1050" b="1" dirty="0">
                 <a:solidFill>
-                  <a:srgbClr val="7A5C8E"/>
+                  <a:srgbClr val="2E7D9A"/>
                 </a:solidFill>
                 <a:latin typeface="Hanken Grotesk" pitchFamily="34" charset="0"/>
                 <a:ea typeface="Hanken Grotesk" pitchFamily="34" charset="-122"/>
@@ -12376,7 +12278,7 @@
             </a:avLst>
           </a:prstGeom>
           <a:solidFill>
-            <a:srgbClr val="7A5C8E"/>
+            <a:srgbClr val="2E7D9A"/>
           </a:solidFill>
           <a:ln/>
         </p:spPr>
@@ -12396,7 +12298,7 @@
                 <a:ea typeface="Outfit" pitchFamily="34" charset="-122"/>
                 <a:cs typeface="Outfit" pitchFamily="34" charset="-120"/>
               </a:rPr>
-              <a:t>6.AT.5</a:t>
+              <a:t>6.NOS.1</a:t>
             </a:r>
             <a:endParaRPr lang="en-US" sz="900" dirty="0"/>
           </a:p>
@@ -12615,7 +12517,7 @@
                 <a:ea typeface="Hanken Grotesk" pitchFamily="34" charset="-122"/>
                 <a:cs typeface="Hanken Grotesk" pitchFamily="34" charset="-120"/>
               </a:rPr>
-              <a:t>Reveal Math Grade 6  ·  Unit 6  ·  Lesson 6-1</a:t>
+              <a:t>Reveal Math Grade 6  ·  Unit 2  ·  Lesson 2-1</a:t>
             </a:r>
             <a:endParaRPr lang="en-US" sz="750" dirty="0"/>
           </a:p>
@@ -12750,7 +12652,7 @@
             </a:avLst>
           </a:prstGeom>
           <a:solidFill>
-            <a:srgbClr val="7A5C8E"/>
+            <a:srgbClr val="2E7D9A"/>
           </a:solidFill>
           <a:ln/>
         </p:spPr>
@@ -12803,7 +12705,7 @@
             <a:r>
               <a:rPr lang="en-US" sz="1300" b="1" dirty="0">
                 <a:solidFill>
-                  <a:srgbClr val="7A5C8E"/>
+                  <a:srgbClr val="2E7D9A"/>
                 </a:solidFill>
                 <a:latin typeface="Outfit" pitchFamily="34" charset="0"/>
                 <a:ea typeface="Outfit" pitchFamily="34" charset="-122"/>
@@ -12865,7 +12767,7 @@
                 <a:ea typeface="Hanken Grotesk" pitchFamily="34" charset="-122"/>
                 <a:cs typeface="Hanken Grotesk" pitchFamily="34" charset="-120"/>
               </a:rPr>
-              <a:t>I can write and evaluate numbers in exponent form using a base and a power.</a:t>
+              <a:t>I can use models to interpret what it means to divide by a fraction.</a:t>
             </a:r>
             <a:endParaRPr lang="en-US" sz="1800" dirty="0"/>
           </a:p>
@@ -12922,7 +12824,7 @@
             </a:avLst>
           </a:prstGeom>
           <a:solidFill>
-            <a:srgbClr val="7A5C8E"/>
+            <a:srgbClr val="2E7D9A"/>
           </a:solidFill>
           <a:ln/>
         </p:spPr>
@@ -12975,7 +12877,7 @@
             <a:r>
               <a:rPr lang="en-US" sz="1300" b="1" dirty="0">
                 <a:solidFill>
-                  <a:srgbClr val="7A5C8E"/>
+                  <a:srgbClr val="2E7D9A"/>
                 </a:solidFill>
                 <a:latin typeface="Outfit" pitchFamily="34" charset="0"/>
                 <a:ea typeface="Outfit" pitchFamily="34" charset="-122"/>
@@ -13037,7 +12939,7 @@
                 <a:ea typeface="Hanken Grotesk" pitchFamily="34" charset="-122"/>
                 <a:cs typeface="Hanken Grotesk" pitchFamily="34" charset="-120"/>
               </a:rPr>
-              <a:t>I can explain my work using the words exponent, base, power, and evaluate.</a:t>
+              <a:t>I can explain a fraction division using the words dividend, divisor, quotient, reciprocal, and unit fraction.</a:t>
             </a:r>
             <a:endParaRPr lang="en-US" sz="1700" dirty="0"/>
           </a:p>
@@ -13190,7 +13092,7 @@
             </a:avLst>
           </a:prstGeom>
           <a:solidFill>
-            <a:srgbClr val="7A5C8E"/>
+            <a:srgbClr val="2E7D9A"/>
           </a:solidFill>
           <a:ln/>
         </p:spPr>
@@ -13210,7 +13112,7 @@
                 <a:ea typeface="Outfit" pitchFamily="34" charset="-122"/>
                 <a:cs typeface="Outfit" pitchFamily="34" charset="-120"/>
               </a:rPr>
-              <a:t>6.AT.5</a:t>
+              <a:t>6.NOS.1</a:t>
             </a:r>
             <a:endParaRPr lang="en-US" sz="900" dirty="0"/>
           </a:p>
@@ -13429,7 +13331,7 @@
                 <a:ea typeface="Hanken Grotesk" pitchFamily="34" charset="-122"/>
                 <a:cs typeface="Hanken Grotesk" pitchFamily="34" charset="-120"/>
               </a:rPr>
-              <a:t>Reveal Math Grade 6  ·  Unit 6  ·  Lesson 6-1</a:t>
+              <a:t>Reveal Math Grade 6  ·  Unit 2  ·  Lesson 2-1</a:t>
             </a:r>
             <a:endParaRPr lang="en-US" sz="750" dirty="0"/>
           </a:p>
@@ -13525,7 +13427,7 @@
             </a:avLst>
           </a:prstGeom>
           <a:solidFill>
-            <a:srgbClr val="7A5C8E"/>
+            <a:srgbClr val="2E7D9A"/>
           </a:solidFill>
           <a:ln/>
         </p:spPr>
@@ -13626,7 +13528,7 @@
                 <a:ea typeface="Hanken Grotesk" pitchFamily="34" charset="-122"/>
                 <a:cs typeface="Hanken Grotesk" pitchFamily="34" charset="-120"/>
               </a:rPr>
-              <a:t>In the sound studio, the volume doubles each time you flip the switch. Why is the volume after 3 flips 2³ = 8 and not 2 × 3 = 6?</a:t>
+              <a:t>Agent Reyes cuts a 3-foot strip of tape into 1/4-foot sections. Before calculating, will the number of sections be more or less than 3? Why?</a:t>
             </a:r>
             <a:endParaRPr lang="en-US" sz="1400" dirty="0"/>
           </a:p>
@@ -13956,7 +13858,7 @@
                 <a:ea typeface="Hanken Grotesk" pitchFamily="34" charset="-122"/>
                 <a:cs typeface="Hanken Grotesk" pitchFamily="34" charset="-120"/>
               </a:rPr>
-              <a:t>Exponent</a:t>
+              <a:t>dividend</a:t>
             </a:r>
             <a:endParaRPr lang="en-US" sz="900" dirty="0"/>
           </a:p>
@@ -14003,7 +13905,7 @@
                 <a:ea typeface="Hanken Grotesk" pitchFamily="34" charset="-122"/>
                 <a:cs typeface="Hanken Grotesk" pitchFamily="34" charset="-120"/>
               </a:rPr>
-              <a:t>Base</a:t>
+              <a:t>divisor</a:t>
             </a:r>
             <a:endParaRPr lang="en-US" sz="900" dirty="0"/>
           </a:p>
@@ -14050,54 +13952,7 @@
                 <a:ea typeface="Hanken Grotesk" pitchFamily="34" charset="-122"/>
                 <a:cs typeface="Hanken Grotesk" pitchFamily="34" charset="-120"/>
               </a:rPr>
-              <a:t>Power</a:t>
-            </a:r>
-            <a:endParaRPr lang="en-US" sz="900" dirty="0"/>
-          </a:p>
-        </p:txBody>
-      </p:sp>
-      <p:sp>
-        <p:nvSpPr>
-          <p:cNvPr id="31" name="Text 29"/>
-          <p:cNvSpPr/>
-          <p:nvPr/>
-        </p:nvSpPr>
-        <p:spPr>
-          <a:xfrm>
-            <a:off x="7520940" y="3227832"/>
-            <a:ext cx="1120140" cy="329184"/>
-          </a:xfrm>
-          <a:prstGeom prst="roundRect">
-            <a:avLst>
-              <a:gd name="adj" fmla="val 13889"/>
-            </a:avLst>
-          </a:prstGeom>
-          <a:solidFill>
-            <a:srgbClr val="FFFFFF"/>
-          </a:solidFill>
-          <a:ln w="12700">
-            <a:solidFill>
-              <a:srgbClr val="D6DBDF"/>
-            </a:solidFill>
-          </a:ln>
-        </p:spPr>
-        <p:txBody>
-          <a:bodyPr wrap="square" rtlCol="0" anchor="ctr"/>
-          <a:lstStyle/>
-          <a:p>
-            <a:pPr algn="ctr" indent="0" marL="0">
-              <a:buNone/>
-            </a:pPr>
-            <a:r>
-              <a:rPr lang="en-US" sz="900" b="1" dirty="0">
-                <a:solidFill>
-                  <a:srgbClr val="17324D"/>
-                </a:solidFill>
-                <a:latin typeface="Hanken Grotesk" pitchFamily="34" charset="0"/>
-                <a:ea typeface="Hanken Grotesk" pitchFamily="34" charset="-122"/>
-                <a:cs typeface="Hanken Grotesk" pitchFamily="34" charset="-120"/>
-              </a:rPr>
-              <a:t>Evaluate</a:t>
+              <a:t>unit fraction</a:t>
             </a:r>
             <a:endParaRPr lang="en-US" sz="900" dirty="0"/>
           </a:p>
@@ -14250,7 +14105,7 @@
             </a:avLst>
           </a:prstGeom>
           <a:solidFill>
-            <a:srgbClr val="7A5C8E"/>
+            <a:srgbClr val="2E7D9A"/>
           </a:solidFill>
           <a:ln/>
         </p:spPr>
@@ -14270,7 +14125,7 @@
                 <a:ea typeface="Outfit" pitchFamily="34" charset="-122"/>
                 <a:cs typeface="Outfit" pitchFamily="34" charset="-120"/>
               </a:rPr>
-              <a:t>6.AT.5</a:t>
+              <a:t>6.NOS.1</a:t>
             </a:r>
             <a:endParaRPr lang="en-US" sz="900" dirty="0"/>
           </a:p>
@@ -14489,7 +14344,7 @@
                 <a:ea typeface="Hanken Grotesk" pitchFamily="34" charset="-122"/>
                 <a:cs typeface="Hanken Grotesk" pitchFamily="34" charset="-120"/>
               </a:rPr>
-              <a:t>Reveal Math Grade 6  ·  Unit 6  ·  Lesson 6-1</a:t>
+              <a:t>Reveal Math Grade 6  ·  Unit 2  ·  Lesson 2-1</a:t>
             </a:r>
             <a:endParaRPr lang="en-US" sz="750" dirty="0"/>
           </a:p>
@@ -14585,7 +14440,7 @@
             </a:avLst>
           </a:prstGeom>
           <a:solidFill>
-            <a:srgbClr val="7A5C8E"/>
+            <a:srgbClr val="2E7D9A"/>
           </a:solidFill>
           <a:ln/>
         </p:spPr>
@@ -14686,7 +14541,7 @@
                 <a:ea typeface="Hanken Grotesk" pitchFamily="34" charset="-122"/>
                 <a:cs typeface="Hanken Grotesk" pitchFamily="34" charset="-120"/>
               </a:rPr>
-              <a:t>Look at the table: when the exponent goes up by 1 (like from 2³ to 2⁴), what happens to the value, and why?</a:t>
+              <a:t>What does 3 ÷ 1/4 actually mean? Show your partner with the bar model.</a:t>
             </a:r>
             <a:endParaRPr lang="en-US" sz="1400" dirty="0"/>
           </a:p>
@@ -15016,7 +14871,7 @@
                 <a:ea typeface="Hanken Grotesk" pitchFamily="34" charset="-122"/>
                 <a:cs typeface="Hanken Grotesk" pitchFamily="34" charset="-120"/>
               </a:rPr>
-              <a:t>Exponent</a:t>
+              <a:t>dividend</a:t>
             </a:r>
             <a:endParaRPr lang="en-US" sz="900" dirty="0"/>
           </a:p>
@@ -15063,7 +14918,7 @@
                 <a:ea typeface="Hanken Grotesk" pitchFamily="34" charset="-122"/>
                 <a:cs typeface="Hanken Grotesk" pitchFamily="34" charset="-120"/>
               </a:rPr>
-              <a:t>Base</a:t>
+              <a:t>divisor</a:t>
             </a:r>
             <a:endParaRPr lang="en-US" sz="900" dirty="0"/>
           </a:p>
@@ -15110,7 +14965,7 @@
                 <a:ea typeface="Hanken Grotesk" pitchFamily="34" charset="-122"/>
                 <a:cs typeface="Hanken Grotesk" pitchFamily="34" charset="-120"/>
               </a:rPr>
-              <a:t>Power</a:t>
+              <a:t>quotient</a:t>
             </a:r>
             <a:endParaRPr lang="en-US" sz="900" dirty="0"/>
           </a:p>
@@ -15157,7 +15012,7 @@
                 <a:ea typeface="Hanken Grotesk" pitchFamily="34" charset="-122"/>
                 <a:cs typeface="Hanken Grotesk" pitchFamily="34" charset="-120"/>
               </a:rPr>
-              <a:t>Evaluate</a:t>
+              <a:t>unit fraction</a:t>
             </a:r>
             <a:endParaRPr lang="en-US" sz="900" dirty="0"/>
           </a:p>
@@ -15310,7 +15165,7 @@
             </a:avLst>
           </a:prstGeom>
           <a:solidFill>
-            <a:srgbClr val="7A5C8E"/>
+            <a:srgbClr val="2E7D9A"/>
           </a:solidFill>
           <a:ln/>
         </p:spPr>
@@ -15330,7 +15185,7 @@
                 <a:ea typeface="Outfit" pitchFamily="34" charset="-122"/>
                 <a:cs typeface="Outfit" pitchFamily="34" charset="-120"/>
               </a:rPr>
-              <a:t>6.AT.5</a:t>
+              <a:t>6.NOS.1</a:t>
             </a:r>
             <a:endParaRPr lang="en-US" sz="900" dirty="0"/>
           </a:p>
@@ -15549,7 +15404,7 @@
                 <a:ea typeface="Hanken Grotesk" pitchFamily="34" charset="-122"/>
                 <a:cs typeface="Hanken Grotesk" pitchFamily="34" charset="-120"/>
               </a:rPr>
-              <a:t>Reveal Math Grade 6  ·  Unit 6  ·  Lesson 6-1</a:t>
+              <a:t>Reveal Math Grade 6  ·  Unit 2  ·  Lesson 2-1</a:t>
             </a:r>
             <a:endParaRPr lang="en-US" sz="750" dirty="0"/>
           </a:p>
@@ -15645,7 +15500,7 @@
             </a:avLst>
           </a:prstGeom>
           <a:solidFill>
-            <a:srgbClr val="7A5C8E"/>
+            <a:srgbClr val="2E7D9A"/>
           </a:solidFill>
           <a:ln/>
         </p:spPr>
@@ -15746,7 +15601,7 @@
                 <a:ea typeface="Hanken Grotesk" pitchFamily="34" charset="-122"/>
                 <a:cs typeface="Hanken Grotesk" pitchFamily="34" charset="-120"/>
               </a:rPr>
-              <a:t>Each recording layer doubles the file size, modeled by 4 × 2ⁿ. Why does the file size grow so fast as you add layers?</a:t>
+              <a:t>Where in cooking, sharing, or building might you divide a whole by a fraction?</a:t>
             </a:r>
             <a:endParaRPr lang="en-US" sz="1400" dirty="0"/>
           </a:p>
@@ -16076,7 +15931,7 @@
                 <a:ea typeface="Hanken Grotesk" pitchFamily="34" charset="-122"/>
                 <a:cs typeface="Hanken Grotesk" pitchFamily="34" charset="-120"/>
               </a:rPr>
-              <a:t>Power</a:t>
+              <a:t>dividend</a:t>
             </a:r>
             <a:endParaRPr lang="en-US" sz="900" dirty="0"/>
           </a:p>
@@ -16123,7 +15978,7 @@
                 <a:ea typeface="Hanken Grotesk" pitchFamily="34" charset="-122"/>
                 <a:cs typeface="Hanken Grotesk" pitchFamily="34" charset="-120"/>
               </a:rPr>
-              <a:t>Base</a:t>
+              <a:t>divisor</a:t>
             </a:r>
             <a:endParaRPr lang="en-US" sz="900" dirty="0"/>
           </a:p>
@@ -16170,54 +16025,7 @@
                 <a:ea typeface="Hanken Grotesk" pitchFamily="34" charset="-122"/>
                 <a:cs typeface="Hanken Grotesk" pitchFamily="34" charset="-120"/>
               </a:rPr>
-              <a:t>Exponent</a:t>
-            </a:r>
-            <a:endParaRPr lang="en-US" sz="900" dirty="0"/>
-          </a:p>
-        </p:txBody>
-      </p:sp>
-      <p:sp>
-        <p:nvSpPr>
-          <p:cNvPr id="31" name="Text 29"/>
-          <p:cNvSpPr/>
-          <p:nvPr/>
-        </p:nvSpPr>
-        <p:spPr>
-          <a:xfrm>
-            <a:off x="7520940" y="3227832"/>
-            <a:ext cx="1120140" cy="329184"/>
-          </a:xfrm>
-          <a:prstGeom prst="roundRect">
-            <a:avLst>
-              <a:gd name="adj" fmla="val 13889"/>
-            </a:avLst>
-          </a:prstGeom>
-          <a:solidFill>
-            <a:srgbClr val="FFFFFF"/>
-          </a:solidFill>
-          <a:ln w="12700">
-            <a:solidFill>
-              <a:srgbClr val="D6DBDF"/>
-            </a:solidFill>
-          </a:ln>
-        </p:spPr>
-        <p:txBody>
-          <a:bodyPr wrap="square" rtlCol="0" anchor="ctr"/>
-          <a:lstStyle/>
-          <a:p>
-            <a:pPr algn="ctr" indent="0" marL="0">
-              <a:buNone/>
-            </a:pPr>
-            <a:r>
-              <a:rPr lang="en-US" sz="900" b="1" dirty="0">
-                <a:solidFill>
-                  <a:srgbClr val="17324D"/>
-                </a:solidFill>
-                <a:latin typeface="Hanken Grotesk" pitchFamily="34" charset="0"/>
-                <a:ea typeface="Hanken Grotesk" pitchFamily="34" charset="-122"/>
-                <a:cs typeface="Hanken Grotesk" pitchFamily="34" charset="-120"/>
-              </a:rPr>
-              <a:t>Evaluate</a:t>
+              <a:t>quotient</a:t>
             </a:r>
             <a:endParaRPr lang="en-US" sz="900" dirty="0"/>
           </a:p>
@@ -16370,7 +16178,7 @@
             </a:avLst>
           </a:prstGeom>
           <a:solidFill>
-            <a:srgbClr val="7A5C8E"/>
+            <a:srgbClr val="2E7D9A"/>
           </a:solidFill>
           <a:ln/>
         </p:spPr>
@@ -16390,7 +16198,7 @@
                 <a:ea typeface="Outfit" pitchFamily="34" charset="-122"/>
                 <a:cs typeface="Outfit" pitchFamily="34" charset="-120"/>
               </a:rPr>
-              <a:t>6.AT.5</a:t>
+              <a:t>6.NOS.1</a:t>
             </a:r>
             <a:endParaRPr lang="en-US" sz="900" dirty="0"/>
           </a:p>
@@ -16609,7 +16417,7 @@
                 <a:ea typeface="Hanken Grotesk" pitchFamily="34" charset="-122"/>
                 <a:cs typeface="Hanken Grotesk" pitchFamily="34" charset="-120"/>
               </a:rPr>
-              <a:t>Reveal Math Grade 6  ·  Unit 6  ·  Lesson 6-1</a:t>
+              <a:t>Reveal Math Grade 6  ·  Unit 2  ·  Lesson 2-1</a:t>
             </a:r>
             <a:endParaRPr lang="en-US" sz="750" dirty="0"/>
           </a:p>
@@ -16705,7 +16513,7 @@
             </a:avLst>
           </a:prstGeom>
           <a:solidFill>
-            <a:srgbClr val="7A5C8E"/>
+            <a:srgbClr val="2E7D9A"/>
           </a:solidFill>
           <a:ln/>
         </p:spPr>
@@ -16806,7 +16614,7 @@
                 <a:ea typeface="Hanken Grotesk" pitchFamily="34" charset="-122"/>
                 <a:cs typeface="Hanken Grotesk" pitchFamily="34" charset="-120"/>
               </a:rPr>
-              <a:t>During practice on Powers and Exponents, what strategy did you use when a problem felt tricky?</a:t>
+              <a:t>During practice on Interpret Division of Fractions, what strategy did you use when a problem felt tricky?</a:t>
             </a:r>
             <a:endParaRPr lang="en-US" sz="1400" dirty="0"/>
           </a:p>
@@ -17136,7 +16944,7 @@
                 <a:ea typeface="Hanken Grotesk" pitchFamily="34" charset="-122"/>
                 <a:cs typeface="Hanken Grotesk" pitchFamily="34" charset="-120"/>
               </a:rPr>
-              <a:t>Exponent</a:t>
+              <a:t>Dividend</a:t>
             </a:r>
             <a:endParaRPr lang="en-US" sz="900" dirty="0"/>
           </a:p>
@@ -17183,7 +16991,7 @@
                 <a:ea typeface="Hanken Grotesk" pitchFamily="34" charset="-122"/>
                 <a:cs typeface="Hanken Grotesk" pitchFamily="34" charset="-120"/>
               </a:rPr>
-              <a:t>Base</a:t>
+              <a:t>Divisor</a:t>
             </a:r>
             <a:endParaRPr lang="en-US" sz="900" dirty="0"/>
           </a:p>
@@ -17230,7 +17038,7 @@
                 <a:ea typeface="Hanken Grotesk" pitchFamily="34" charset="-122"/>
                 <a:cs typeface="Hanken Grotesk" pitchFamily="34" charset="-120"/>
               </a:rPr>
-              <a:t>Power</a:t>
+              <a:t>Quotient</a:t>
             </a:r>
             <a:endParaRPr lang="en-US" sz="900" dirty="0"/>
           </a:p>
@@ -17277,7 +17085,7 @@
                 <a:ea typeface="Hanken Grotesk" pitchFamily="34" charset="-122"/>
                 <a:cs typeface="Hanken Grotesk" pitchFamily="34" charset="-120"/>
               </a:rPr>
-              <a:t>Evaluate</a:t>
+              <a:t>Reciprocal</a:t>
             </a:r>
             <a:endParaRPr lang="en-US" sz="900" dirty="0"/>
           </a:p>
@@ -17430,7 +17238,7 @@
             </a:avLst>
           </a:prstGeom>
           <a:solidFill>
-            <a:srgbClr val="7A5C8E"/>
+            <a:srgbClr val="2E7D9A"/>
           </a:solidFill>
           <a:ln/>
         </p:spPr>
@@ -17450,7 +17258,7 @@
                 <a:ea typeface="Outfit" pitchFamily="34" charset="-122"/>
                 <a:cs typeface="Outfit" pitchFamily="34" charset="-120"/>
               </a:rPr>
-              <a:t>6.AT.5</a:t>
+              <a:t>6.NOS.1</a:t>
             </a:r>
             <a:endParaRPr lang="en-US" sz="900" dirty="0"/>
           </a:p>
@@ -17669,7 +17477,7 @@
                 <a:ea typeface="Hanken Grotesk" pitchFamily="34" charset="-122"/>
                 <a:cs typeface="Hanken Grotesk" pitchFamily="34" charset="-120"/>
               </a:rPr>
-              <a:t>Reveal Math Grade 6  ·  Unit 6  ·  Lesson 6-1</a:t>
+              <a:t>Reveal Math Grade 6  ·  Unit 2  ·  Lesson 2-1</a:t>
             </a:r>
             <a:endParaRPr lang="en-US" sz="750" dirty="0"/>
           </a:p>
@@ -17765,7 +17573,7 @@
             </a:avLst>
           </a:prstGeom>
           <a:solidFill>
-            <a:srgbClr val="7A5C8E"/>
+            <a:srgbClr val="2E7D9A"/>
           </a:solidFill>
           <a:ln/>
         </p:spPr>
@@ -17824,7 +17632,7 @@
                 <a:ea typeface="Outfit" pitchFamily="34" charset="-122"/>
                 <a:cs typeface="Outfit" pitchFamily="34" charset="-120"/>
               </a:rPr>
-              <a:t>Sound Check</a:t>
+              <a:t>Detective Agency Case File</a:t>
             </a:r>
             <a:endParaRPr lang="en-US" sz="1100" dirty="0"/>
           </a:p>
@@ -17863,7 +17671,7 @@
                 <a:ea typeface="Hanken Grotesk" pitchFamily="34" charset="-122"/>
                 <a:cs typeface="Hanken Grotesk" pitchFamily="34" charset="-120"/>
               </a:rPr>
-              <a:t>You're a sound engineer at a music studio. Each time you flip a switch, the volume doubles. The starting volume is 1 unit. After flipping the switch 3 times, the volume is 2³ = 2 × 2 × 2 = 8 units — that's 8 times louder! How loud does it get after more flips?</a:t>
+              <a:t>Agent Reyes finds a 3-foot strip of tape at the crime scene. The lab needs the tape cut into 1/4-foot sections for analysis. How many sections can be made? The answer cracks the code to the locked evidence vault.</a:t>
             </a:r>
             <a:endParaRPr lang="en-US" sz="1150" dirty="0"/>
           </a:p>
@@ -18088,7 +17896,7 @@
                 <a:ea typeface="Hanken Grotesk" pitchFamily="34" charset="-122"/>
                 <a:cs typeface="Hanken Grotesk" pitchFamily="34" charset="-120"/>
               </a:rPr>
-              <a:t>•  What happens to the volume each time you flip a switch?</a:t>
+              <a:t>•  What total length is being divided?</a:t>
             </a:r>
             <a:endParaRPr lang="en-US" sz="1000" dirty="0"/>
           </a:p>
@@ -18108,7 +17916,7 @@
                 <a:ea typeface="Hanken Grotesk" pitchFamily="34" charset="-122"/>
                 <a:cs typeface="Hanken Grotesk" pitchFamily="34" charset="-120"/>
               </a:rPr>
-              <a:t>•  Why is 2³ equal to 8, not 6?</a:t>
+              <a:t>•  What is the size of each section?</a:t>
             </a:r>
             <a:endParaRPr lang="en-US" sz="1000" dirty="0"/>
           </a:p>
@@ -18128,7 +17936,7 @@
                 <a:ea typeface="Hanken Grotesk" pitchFamily="34" charset="-122"/>
                 <a:cs typeface="Hanken Grotesk" pitchFamily="34" charset="-120"/>
               </a:rPr>
-              <a:t>•  How is repeated multiplication different from repeated addition?</a:t>
+              <a:t>•  Will the answer be greater than or less than 3?</a:t>
             </a:r>
             <a:endParaRPr lang="en-US" sz="1000" dirty="0"/>
           </a:p>
@@ -18245,7 +18053,7 @@
                 <a:ea typeface="Hanken Grotesk" pitchFamily="34" charset="-122"/>
                 <a:cs typeface="Hanken Grotesk" pitchFamily="34" charset="-120"/>
               </a:rPr>
-              <a:t>•  What if the volume tripled each time instead of doubled?</a:t>
+              <a:t>•  What does it mean to divide by a fraction?</a:t>
             </a:r>
             <a:endParaRPr lang="en-US" sz="1000" dirty="0"/>
           </a:p>
@@ -18265,7 +18073,7 @@
                 <a:ea typeface="Hanken Grotesk" pitchFamily="34" charset="-122"/>
                 <a:cs typeface="Hanken Grotesk" pitchFamily="34" charset="-120"/>
               </a:rPr>
-              <a:t>•  How many flips would it take to reach over 1,000 volume units?</a:t>
+              <a:t>•  Why does dividing by 1/4 give a bigger number?</a:t>
             </a:r>
             <a:endParaRPr lang="en-US" sz="1000" dirty="0"/>
           </a:p>
@@ -18418,7 +18226,7 @@
             </a:avLst>
           </a:prstGeom>
           <a:solidFill>
-            <a:srgbClr val="7A5C8E"/>
+            <a:srgbClr val="2E7D9A"/>
           </a:solidFill>
           <a:ln/>
         </p:spPr>
@@ -18438,7 +18246,7 @@
                 <a:ea typeface="Outfit" pitchFamily="34" charset="-122"/>
                 <a:cs typeface="Outfit" pitchFamily="34" charset="-120"/>
               </a:rPr>
-              <a:t>6.AT.5</a:t>
+              <a:t>6.NOS.1</a:t>
             </a:r>
             <a:endParaRPr lang="en-US" sz="900" dirty="0"/>
           </a:p>
@@ -18657,7 +18465,7 @@
                 <a:ea typeface="Hanken Grotesk" pitchFamily="34" charset="-122"/>
                 <a:cs typeface="Hanken Grotesk" pitchFamily="34" charset="-120"/>
               </a:rPr>
-              <a:t>Reveal Math Grade 6  ·  Unit 6  ·  Lesson 6-1</a:t>
+              <a:t>Reveal Math Grade 6  ·  Unit 2  ·  Lesson 2-1</a:t>
             </a:r>
             <a:endParaRPr lang="en-US" sz="750" dirty="0"/>
           </a:p>
@@ -18953,7 +18761,7 @@
                           <a:ea typeface="Hanken Grotesk" pitchFamily="34" charset="-122"/>
                           <a:cs typeface="Hanken Grotesk" pitchFamily="34" charset="-120"/>
                         </a:rPr>
-                        <a:t>Exponent</a:t>
+                        <a:t>Dividend</a:t>
                       </a:r>
                       <a:pPr indent="0" marL="0">
                         <a:buNone/>
@@ -18977,7 +18785,7 @@
                           <a:ea typeface="Hanken Grotesk" pitchFamily="34" charset="-122"/>
                           <a:cs typeface="Hanken Grotesk" pitchFamily="34" charset="-120"/>
                         </a:rPr>
-                        <a:t>Exponente</a:t>
+                        <a:t>Dividendo</a:t>
                       </a:r>
                       <a:endParaRPr lang="en-US" sz="950" dirty="0">
                         <a:latin typeface="Hanken Grotesk" charset="0"/>
@@ -19045,7 +18853,7 @@
                           <a:ea typeface="Hanken Grotesk" pitchFamily="34" charset="-122"/>
                           <a:cs typeface="Hanken Grotesk" pitchFamily="34" charset="-120"/>
                         </a:rPr>
-                        <a:t>A small number that tells how many times to multiply the number by itself.</a:t>
+                        <a:t>The number you are splitting up in a division problem.</a:t>
                       </a:r>
                       <a:pPr indent="0" marL="0">
                         <a:buNone/>
@@ -19069,7 +18877,7 @@
                           <a:ea typeface="Hanken Grotesk" pitchFamily="34" charset="-122"/>
                           <a:cs typeface="Hanken Grotesk" pitchFamily="34" charset="-120"/>
                         </a:rPr>
-                        <a:t>Un número pequeño que dice cuántas veces multiplicar el número por sí mismo.</a:t>
+                        <a:t>El número que estás repartiendo en una división.</a:t>
                       </a:r>
                       <a:endParaRPr lang="en-US" sz="900" dirty="0">
                         <a:latin typeface="Hanken Grotesk" charset="0"/>
@@ -19137,7 +18945,7 @@
                           <a:ea typeface="Hanken Grotesk" pitchFamily="34" charset="-122"/>
                           <a:cs typeface="Hanken Grotesk" pitchFamily="34" charset="-120"/>
                         </a:rPr>
-                        <a:t>In 2³, the small 3 means multiply 2 by itself 3 times: 2 × 2 × 2 = 8</a:t>
+                        <a:t>In 3 ÷ 1/4 = 12, the dividend is 3 — it is the total being split</a:t>
                       </a:r>
                       <a:endParaRPr lang="en-US" sz="900" dirty="0">
                         <a:latin typeface="Hanken Grotesk" charset="0"/>
@@ -19207,7 +19015,7 @@
                           <a:ea typeface="Hanken Grotesk" pitchFamily="34" charset="-122"/>
                           <a:cs typeface="Hanken Grotesk" pitchFamily="34" charset="-120"/>
                         </a:rPr>
-                        <a:t>Base</a:t>
+                        <a:t>Divisor</a:t>
                       </a:r>
                       <a:pPr indent="0" marL="0">
                         <a:buNone/>
@@ -19231,7 +19039,7 @@
                           <a:ea typeface="Hanken Grotesk" pitchFamily="34" charset="-122"/>
                           <a:cs typeface="Hanken Grotesk" pitchFamily="34" charset="-120"/>
                         </a:rPr>
-                        <a:t>Base</a:t>
+                        <a:t>Divisor</a:t>
                       </a:r>
                       <a:endParaRPr lang="en-US" sz="950" dirty="0">
                         <a:latin typeface="Hanken Grotesk" charset="0"/>
@@ -19299,7 +19107,7 @@
                           <a:ea typeface="Hanken Grotesk" pitchFamily="34" charset="-122"/>
                           <a:cs typeface="Hanken Grotesk" pitchFamily="34" charset="-120"/>
                         </a:rPr>
-                        <a:t>The number that gets multiplied by itself.</a:t>
+                        <a:t>The number you split by in a division problem.</a:t>
                       </a:r>
                       <a:pPr indent="0" marL="0">
                         <a:buNone/>
@@ -19323,7 +19131,7 @@
                           <a:ea typeface="Hanken Grotesk" pitchFamily="34" charset="-122"/>
                           <a:cs typeface="Hanken Grotesk" pitchFamily="34" charset="-120"/>
                         </a:rPr>
-                        <a:t>El número que se multiplica por sí mismo.</a:t>
+                        <a:t>El número entre el que divides en una división.</a:t>
                       </a:r>
                       <a:endParaRPr lang="en-US" sz="900" dirty="0">
                         <a:latin typeface="Hanken Grotesk" charset="0"/>
@@ -19391,7 +19199,7 @@
                           <a:ea typeface="Hanken Grotesk" pitchFamily="34" charset="-122"/>
                           <a:cs typeface="Hanken Grotesk" pitchFamily="34" charset="-120"/>
                         </a:rPr>
-                        <a:t>In 5², the base is 5 — it is the number being multiplied: 5 × 5 = 25</a:t>
+                        <a:t>In 3 ÷ 1/4 = 12, the divisor is 1/4 — it is the size of each piece</a:t>
                       </a:r>
                       <a:endParaRPr lang="en-US" sz="900" dirty="0">
                         <a:latin typeface="Hanken Grotesk" charset="0"/>
@@ -19461,7 +19269,7 @@
                           <a:ea typeface="Hanken Grotesk" pitchFamily="34" charset="-122"/>
                           <a:cs typeface="Hanken Grotesk" pitchFamily="34" charset="-120"/>
                         </a:rPr>
-                        <a:t>Power</a:t>
+                        <a:t>Quotient</a:t>
                       </a:r>
                       <a:pPr indent="0" marL="0">
                         <a:buNone/>
@@ -19485,7 +19293,7 @@
                           <a:ea typeface="Hanken Grotesk" pitchFamily="34" charset="-122"/>
                           <a:cs typeface="Hanken Grotesk" pitchFamily="34" charset="-120"/>
                         </a:rPr>
-                        <a:t>Potencia</a:t>
+                        <a:t>Cociente</a:t>
                       </a:r>
                       <a:endParaRPr lang="en-US" sz="950" dirty="0">
                         <a:latin typeface="Hanken Grotesk" charset="0"/>
@@ -19553,7 +19361,7 @@
                           <a:ea typeface="Hanken Grotesk" pitchFamily="34" charset="-122"/>
                           <a:cs typeface="Hanken Grotesk" pitchFamily="34" charset="-120"/>
                         </a:rPr>
-                        <a:t>A number written with a base and an exponent, like 2³.</a:t>
+                        <a:t>The answer when you divide.</a:t>
                       </a:r>
                       <a:pPr indent="0" marL="0">
                         <a:buNone/>
@@ -19577,7 +19385,7 @@
                           <a:ea typeface="Hanken Grotesk" pitchFamily="34" charset="-122"/>
                           <a:cs typeface="Hanken Grotesk" pitchFamily="34" charset="-120"/>
                         </a:rPr>
-                        <a:t>Un número escrito con una base y un exponente, como 2³.</a:t>
+                        <a:t>La respuesta cuando divides.</a:t>
                       </a:r>
                       <a:endParaRPr lang="en-US" sz="900" dirty="0">
                         <a:latin typeface="Hanken Grotesk" charset="0"/>
@@ -19645,7 +19453,7 @@
                           <a:ea typeface="Hanken Grotesk" pitchFamily="34" charset="-122"/>
                           <a:cs typeface="Hanken Grotesk" pitchFamily="34" charset="-120"/>
                         </a:rPr>
-                        <a:t>10³ = 10 × 10 × 10 = 1,000 — read as '10 to the third power' or '10 cubed'</a:t>
+                        <a:t>In 3 ÷ 1/4 = 12, the quotient is 12 — there are 12 quarter-size pieces in 3</a:t>
                       </a:r>
                       <a:endParaRPr lang="en-US" sz="900" dirty="0">
                         <a:latin typeface="Hanken Grotesk" charset="0"/>
@@ -19715,7 +19523,7 @@
                           <a:ea typeface="Hanken Grotesk" pitchFamily="34" charset="-122"/>
                           <a:cs typeface="Hanken Grotesk" pitchFamily="34" charset="-120"/>
                         </a:rPr>
-                        <a:t>Evaluate</a:t>
+                        <a:t>Reciprocal</a:t>
                       </a:r>
                       <a:pPr indent="0" marL="0">
                         <a:buNone/>
@@ -19739,7 +19547,7 @@
                           <a:ea typeface="Hanken Grotesk" pitchFamily="34" charset="-122"/>
                           <a:cs typeface="Hanken Grotesk" pitchFamily="34" charset="-120"/>
                         </a:rPr>
-                        <a:t>Evaluar</a:t>
+                        <a:t>Recíproco</a:t>
                       </a:r>
                       <a:endParaRPr lang="en-US" sz="950" dirty="0">
                         <a:latin typeface="Hanken Grotesk" charset="0"/>
@@ -19807,7 +19615,7 @@
                           <a:ea typeface="Hanken Grotesk" pitchFamily="34" charset="-122"/>
                           <a:cs typeface="Hanken Grotesk" pitchFamily="34" charset="-120"/>
                         </a:rPr>
-                        <a:t>To find the value of an expression.</a:t>
+                        <a:t>A fraction turned upside down.</a:t>
                       </a:r>
                       <a:pPr indent="0" marL="0">
                         <a:buNone/>
@@ -19831,7 +19639,7 @@
                           <a:ea typeface="Hanken Grotesk" pitchFamily="34" charset="-122"/>
                           <a:cs typeface="Hanken Grotesk" pitchFamily="34" charset="-120"/>
                         </a:rPr>
-                        <a:t>Encontrar el valor de una expresión.</a:t>
+                        <a:t>Una fracción volteada de arriba abajo.</a:t>
                       </a:r>
                       <a:endParaRPr lang="en-US" sz="900" dirty="0">
                         <a:latin typeface="Hanken Grotesk" charset="0"/>
@@ -19899,7 +19707,7 @@
                           <a:ea typeface="Hanken Grotesk" pitchFamily="34" charset="-122"/>
                           <a:cs typeface="Hanken Grotesk" pitchFamily="34" charset="-120"/>
                         </a:rPr>
-                        <a:t>Evaluate 3⁴: write 3 × 3 × 3 × 3, then multiply step by step: 9 × 9 = 81</a:t>
+                        <a:t>The reciprocal of 1/4 is 4/1 = 4. Multiplying by the reciprocal gives the same result as dividing.</a:t>
                       </a:r>
                       <a:endParaRPr lang="en-US" sz="900" dirty="0">
                         <a:latin typeface="Hanken Grotesk" charset="0"/>
@@ -19951,6 +19759,260 @@
                   </a:tcPr>
                 </a:tc>
               </a:tr>
+              <a:tr h="457200">
+                <a:tc>
+                  <a:txBody>
+                    <a:bodyPr/>
+                    <a:lstStyle/>
+                    <a:p>
+                      <a:pPr indent="0" marL="0">
+                        <a:buNone/>
+                      </a:pPr>
+                      <a:r>
+                        <a:rPr lang="en-US" sz="950" b="1" dirty="0">
+                          <a:solidFill>
+                            <a:srgbClr val="17324D"/>
+                          </a:solidFill>
+                          <a:latin typeface="Hanken Grotesk" pitchFamily="34" charset="0"/>
+                          <a:ea typeface="Hanken Grotesk" pitchFamily="34" charset="-122"/>
+                          <a:cs typeface="Hanken Grotesk" pitchFamily="34" charset="-120"/>
+                        </a:rPr>
+                        <a:t>Unit fraction</a:t>
+                      </a:r>
+                      <a:pPr indent="0" marL="0">
+                        <a:buNone/>
+                      </a:pPr>
+                      <a:endParaRPr lang="en-US" sz="950" dirty="0">
+                        <a:latin typeface="Hanken Grotesk" charset="0"/>
+                        <a:ea typeface="Hanken Grotesk" charset="0"/>
+                        <a:cs typeface="Hanken Grotesk" charset="0"/>
+                      </a:endParaRPr>
+                    </a:p>
+                    <a:p>
+                      <a:pPr indent="0" marL="0">
+                        <a:buNone/>
+                      </a:pPr>
+                      <a:r>
+                        <a:rPr lang="en-US" sz="850" i="1" dirty="0">
+                          <a:solidFill>
+                            <a:srgbClr val="8A96A3"/>
+                          </a:solidFill>
+                          <a:latin typeface="Hanken Grotesk" pitchFamily="34" charset="0"/>
+                          <a:ea typeface="Hanken Grotesk" pitchFamily="34" charset="-122"/>
+                          <a:cs typeface="Hanken Grotesk" pitchFamily="34" charset="-120"/>
+                        </a:rPr>
+                        <a:t>Fracción unitaria</a:t>
+                      </a:r>
+                      <a:endParaRPr lang="en-US" sz="950" dirty="0">
+                        <a:latin typeface="Hanken Grotesk" charset="0"/>
+                        <a:ea typeface="Hanken Grotesk" charset="0"/>
+                        <a:cs typeface="Hanken Grotesk" charset="0"/>
+                      </a:endParaRPr>
+                    </a:p>
+                  </a:txBody>
+                  <a:tcPr marL="91440" marR="91440" marT="45720" marB="45720" anchor="ctr">
+                    <a:lnL w="9525" cap="flat" cmpd="sng" algn="ctr">
+                      <a:solidFill>
+                        <a:srgbClr val="D6DBDF"/>
+                      </a:solidFill>
+                      <a:prstDash val="solid"/>
+                      <a:round/>
+                      <a:headEnd type="none" w="med" len="med"/>
+                      <a:tailEnd type="none" w="med" len="med"/>
+                    </a:lnL>
+                    <a:lnR w="9525" cap="flat" cmpd="sng" algn="ctr">
+                      <a:solidFill>
+                        <a:srgbClr val="D6DBDF"/>
+                      </a:solidFill>
+                      <a:prstDash val="solid"/>
+                      <a:round/>
+                      <a:headEnd type="none" w="med" len="med"/>
+                      <a:tailEnd type="none" w="med" len="med"/>
+                    </a:lnR>
+                    <a:lnT w="9525" cap="flat" cmpd="sng" algn="ctr">
+                      <a:solidFill>
+                        <a:srgbClr val="D6DBDF"/>
+                      </a:solidFill>
+                      <a:prstDash val="solid"/>
+                      <a:round/>
+                      <a:headEnd type="none" w="med" len="med"/>
+                      <a:tailEnd type="none" w="med" len="med"/>
+                    </a:lnT>
+                    <a:lnB w="9525" cap="flat" cmpd="sng" algn="ctr">
+                      <a:solidFill>
+                        <a:srgbClr val="D6DBDF"/>
+                      </a:solidFill>
+                      <a:prstDash val="solid"/>
+                      <a:round/>
+                      <a:headEnd type="none" w="med" len="med"/>
+                      <a:tailEnd type="none" w="med" len="med"/>
+                    </a:lnB>
+                    <a:solidFill>
+                      <a:srgbClr val="FFFFFF"/>
+                    </a:solidFill>
+                  </a:tcPr>
+                </a:tc>
+                <a:tc>
+                  <a:txBody>
+                    <a:bodyPr/>
+                    <a:lstStyle/>
+                    <a:p>
+                      <a:pPr indent="0" marL="0">
+                        <a:buNone/>
+                      </a:pPr>
+                      <a:r>
+                        <a:rPr lang="en-US" sz="900" dirty="0">
+                          <a:solidFill>
+                            <a:srgbClr val="24323F"/>
+                          </a:solidFill>
+                          <a:latin typeface="Hanken Grotesk" pitchFamily="34" charset="0"/>
+                          <a:ea typeface="Hanken Grotesk" pitchFamily="34" charset="-122"/>
+                          <a:cs typeface="Hanken Grotesk" pitchFamily="34" charset="-120"/>
+                        </a:rPr>
+                        <a:t>A fraction with 1 on top, like 1/4.</a:t>
+                      </a:r>
+                      <a:pPr indent="0" marL="0">
+                        <a:buNone/>
+                      </a:pPr>
+                      <a:endParaRPr lang="en-US" sz="900" dirty="0">
+                        <a:latin typeface="Hanken Grotesk" charset="0"/>
+                        <a:ea typeface="Hanken Grotesk" charset="0"/>
+                        <a:cs typeface="Hanken Grotesk" charset="0"/>
+                      </a:endParaRPr>
+                    </a:p>
+                    <a:p>
+                      <a:pPr indent="0" marL="0">
+                        <a:buNone/>
+                      </a:pPr>
+                      <a:r>
+                        <a:rPr lang="en-US" sz="850" i="1" dirty="0">
+                          <a:solidFill>
+                            <a:srgbClr val="8A96A3"/>
+                          </a:solidFill>
+                          <a:latin typeface="Hanken Grotesk" pitchFamily="34" charset="0"/>
+                          <a:ea typeface="Hanken Grotesk" pitchFamily="34" charset="-122"/>
+                          <a:cs typeface="Hanken Grotesk" pitchFamily="34" charset="-120"/>
+                        </a:rPr>
+                        <a:t>Una fracción con 1 arriba, como 1/4.</a:t>
+                      </a:r>
+                      <a:endParaRPr lang="en-US" sz="900" dirty="0">
+                        <a:latin typeface="Hanken Grotesk" charset="0"/>
+                        <a:ea typeface="Hanken Grotesk" charset="0"/>
+                        <a:cs typeface="Hanken Grotesk" charset="0"/>
+                      </a:endParaRPr>
+                    </a:p>
+                  </a:txBody>
+                  <a:tcPr marL="91440" marR="91440" marT="45720" marB="45720" anchor="ctr">
+                    <a:lnL w="9525" cap="flat" cmpd="sng" algn="ctr">
+                      <a:solidFill>
+                        <a:srgbClr val="D6DBDF"/>
+                      </a:solidFill>
+                      <a:prstDash val="solid"/>
+                      <a:round/>
+                      <a:headEnd type="none" w="med" len="med"/>
+                      <a:tailEnd type="none" w="med" len="med"/>
+                    </a:lnL>
+                    <a:lnR w="9525" cap="flat" cmpd="sng" algn="ctr">
+                      <a:solidFill>
+                        <a:srgbClr val="D6DBDF"/>
+                      </a:solidFill>
+                      <a:prstDash val="solid"/>
+                      <a:round/>
+                      <a:headEnd type="none" w="med" len="med"/>
+                      <a:tailEnd type="none" w="med" len="med"/>
+                    </a:lnR>
+                    <a:lnT w="9525" cap="flat" cmpd="sng" algn="ctr">
+                      <a:solidFill>
+                        <a:srgbClr val="D6DBDF"/>
+                      </a:solidFill>
+                      <a:prstDash val="solid"/>
+                      <a:round/>
+                      <a:headEnd type="none" w="med" len="med"/>
+                      <a:tailEnd type="none" w="med" len="med"/>
+                    </a:lnT>
+                    <a:lnB w="9525" cap="flat" cmpd="sng" algn="ctr">
+                      <a:solidFill>
+                        <a:srgbClr val="D6DBDF"/>
+                      </a:solidFill>
+                      <a:prstDash val="solid"/>
+                      <a:round/>
+                      <a:headEnd type="none" w="med" len="med"/>
+                      <a:tailEnd type="none" w="med" len="med"/>
+                    </a:lnB>
+                    <a:solidFill>
+                      <a:srgbClr val="FFFFFF"/>
+                    </a:solidFill>
+                  </a:tcPr>
+                </a:tc>
+                <a:tc>
+                  <a:txBody>
+                    <a:bodyPr/>
+                    <a:lstStyle/>
+                    <a:p>
+                      <a:pPr indent="0" marL="0">
+                        <a:buNone/>
+                      </a:pPr>
+                      <a:r>
+                        <a:rPr lang="en-US" sz="900" i="1" dirty="0">
+                          <a:solidFill>
+                            <a:srgbClr val="24323F"/>
+                          </a:solidFill>
+                          <a:latin typeface="Hanken Grotesk" pitchFamily="34" charset="0"/>
+                          <a:ea typeface="Hanken Grotesk" pitchFamily="34" charset="-122"/>
+                          <a:cs typeface="Hanken Grotesk" pitchFamily="34" charset="-120"/>
+                        </a:rPr>
+                        <a:t>1/2, 1/3, 1/4, 1/5 — each represents one equal part of a whole</a:t>
+                      </a:r>
+                      <a:endParaRPr lang="en-US" sz="900" dirty="0">
+                        <a:latin typeface="Hanken Grotesk" charset="0"/>
+                        <a:ea typeface="Hanken Grotesk" charset="0"/>
+                        <a:cs typeface="Hanken Grotesk" charset="0"/>
+                      </a:endParaRPr>
+                    </a:p>
+                  </a:txBody>
+                  <a:tcPr marL="91440" marR="91440" marT="45720" marB="45720" anchor="ctr">
+                    <a:lnL w="9525" cap="flat" cmpd="sng" algn="ctr">
+                      <a:solidFill>
+                        <a:srgbClr val="D6DBDF"/>
+                      </a:solidFill>
+                      <a:prstDash val="solid"/>
+                      <a:round/>
+                      <a:headEnd type="none" w="med" len="med"/>
+                      <a:tailEnd type="none" w="med" len="med"/>
+                    </a:lnL>
+                    <a:lnR w="9525" cap="flat" cmpd="sng" algn="ctr">
+                      <a:solidFill>
+                        <a:srgbClr val="D6DBDF"/>
+                      </a:solidFill>
+                      <a:prstDash val="solid"/>
+                      <a:round/>
+                      <a:headEnd type="none" w="med" len="med"/>
+                      <a:tailEnd type="none" w="med" len="med"/>
+                    </a:lnR>
+                    <a:lnT w="9525" cap="flat" cmpd="sng" algn="ctr">
+                      <a:solidFill>
+                        <a:srgbClr val="D6DBDF"/>
+                      </a:solidFill>
+                      <a:prstDash val="solid"/>
+                      <a:round/>
+                      <a:headEnd type="none" w="med" len="med"/>
+                      <a:tailEnd type="none" w="med" len="med"/>
+                    </a:lnT>
+                    <a:lnB w="9525" cap="flat" cmpd="sng" algn="ctr">
+                      <a:solidFill>
+                        <a:srgbClr val="D6DBDF"/>
+                      </a:solidFill>
+                      <a:prstDash val="solid"/>
+                      <a:round/>
+                      <a:headEnd type="none" w="med" len="med"/>
+                      <a:tailEnd type="none" w="med" len="med"/>
+                    </a:lnB>
+                    <a:solidFill>
+                      <a:srgbClr val="FFFFFF"/>
+                    </a:solidFill>
+                  </a:tcPr>
+                </a:tc>
+              </a:tr>
             </a:tbl>
           </a:graphicData>
         </a:graphic>
@@ -19963,7 +20025,7 @@
         </p:nvSpPr>
         <p:spPr>
           <a:xfrm>
-            <a:off x="411480" y="3063240"/>
+            <a:off x="411480" y="3520440"/>
             <a:ext cx="8412480" cy="237744"/>
           </a:xfrm>
           <a:prstGeom prst="rect">
@@ -19988,7 +20050,7 @@
                 <a:ea typeface="Outfit" pitchFamily="34" charset="-122"/>
                 <a:cs typeface="Outfit" pitchFamily="34" charset="-120"/>
               </a:rPr>
-              <a:t>Exponent — example vs. non-example:</a:t>
+              <a:t>Reciprocal — example vs. non-example:</a:t>
             </a:r>
             <a:endParaRPr lang="en-US" sz="950" dirty="0"/>
           </a:p>
@@ -20002,7 +20064,7 @@
         </p:nvSpPr>
         <p:spPr>
           <a:xfrm>
-            <a:off x="411480" y="3355848"/>
+            <a:off x="411480" y="3813048"/>
             <a:ext cx="4114800" cy="457200"/>
           </a:xfrm>
           <a:prstGeom prst="roundRect">
@@ -20036,7 +20098,7 @@
         </p:nvSpPr>
         <p:spPr>
           <a:xfrm>
-            <a:off x="521208" y="3355848"/>
+            <a:off x="521208" y="3813048"/>
             <a:ext cx="3895344" cy="457200"/>
           </a:xfrm>
           <a:prstGeom prst="rect">
@@ -20075,7 +20137,7 @@
                 <a:ea typeface="Hanken Grotesk" pitchFamily="34" charset="-122"/>
                 <a:cs typeface="Hanken Grotesk" pitchFamily="34" charset="-120"/>
               </a:rPr>
-              <a:t>The 4 in 3⁴  </a:t>
+              <a:t>The reciprocal of 3/4 is 4/3  </a:t>
             </a:r>
             <a:pPr indent="0" marL="0">
               <a:buNone/>
@@ -20089,7 +20151,7 @@
                 <a:ea typeface="Hanken Grotesk" pitchFamily="34" charset="-122"/>
                 <a:cs typeface="Hanken Grotesk" pitchFamily="34" charset="-120"/>
               </a:rPr>
-              <a:t>It shows 3 is multiplied 4 times.</a:t>
+              <a:t>Flipping 3/4 gives 4/3.</a:t>
             </a:r>
             <a:endParaRPr lang="en-US" sz="900" dirty="0"/>
           </a:p>
@@ -20103,7 +20165,7 @@
         </p:nvSpPr>
         <p:spPr>
           <a:xfrm>
-            <a:off x="4663440" y="3355848"/>
+            <a:off x="4663440" y="3813048"/>
             <a:ext cx="4114800" cy="457200"/>
           </a:xfrm>
           <a:prstGeom prst="roundRect">
@@ -20137,7 +20199,7 @@
         </p:nvSpPr>
         <p:spPr>
           <a:xfrm>
-            <a:off x="4773168" y="3355848"/>
+            <a:off x="4773168" y="3813048"/>
             <a:ext cx="3895344" cy="457200"/>
           </a:xfrm>
           <a:prstGeom prst="rect">
@@ -20176,7 +20238,7 @@
                 <a:ea typeface="Hanken Grotesk" pitchFamily="34" charset="-122"/>
                 <a:cs typeface="Hanken Grotesk" pitchFamily="34" charset="-120"/>
               </a:rPr>
-              <a:t>The 3 in 3⁴  </a:t>
+              <a:t>The reciprocal of 3/4 is 3/4  </a:t>
             </a:r>
             <a:pPr indent="0" marL="0">
               <a:buNone/>
@@ -20190,7 +20252,7 @@
                 <a:ea typeface="Hanken Grotesk" pitchFamily="34" charset="-122"/>
                 <a:cs typeface="Hanken Grotesk" pitchFamily="34" charset="-120"/>
               </a:rPr>
-              <a:t>The 3 is the base, not the exponent.</a:t>
+              <a:t>The reciprocal flips the fraction; it is not the same fraction.</a:t>
             </a:r>
             <a:endParaRPr lang="en-US" sz="900" dirty="0"/>
           </a:p>
@@ -20343,7 +20405,7 @@
             </a:avLst>
           </a:prstGeom>
           <a:solidFill>
-            <a:srgbClr val="7A5C8E"/>
+            <a:srgbClr val="2E7D9A"/>
           </a:solidFill>
           <a:ln/>
         </p:spPr>
@@ -20363,7 +20425,7 @@
                 <a:ea typeface="Outfit" pitchFamily="34" charset="-122"/>
                 <a:cs typeface="Outfit" pitchFamily="34" charset="-120"/>
               </a:rPr>
-              <a:t>6.AT.5</a:t>
+              <a:t>6.NOS.1</a:t>
             </a:r>
             <a:endParaRPr lang="en-US" sz="900" dirty="0"/>
           </a:p>
@@ -20582,7 +20644,7 @@
                 <a:ea typeface="Hanken Grotesk" pitchFamily="34" charset="-122"/>
                 <a:cs typeface="Hanken Grotesk" pitchFamily="34" charset="-120"/>
               </a:rPr>
-              <a:t>Reveal Math Grade 6  ·  Unit 6  ·  Lesson 6-1</a:t>
+              <a:t>Reveal Math Grade 6  ·  Unit 2  ·  Lesson 2-1</a:t>
             </a:r>
             <a:endParaRPr lang="en-US" sz="750" dirty="0"/>
           </a:p>
@@ -20678,7 +20740,7 @@
             </a:avLst>
           </a:prstGeom>
           <a:solidFill>
-            <a:srgbClr val="7A5C8E"/>
+            <a:srgbClr val="2E7D9A"/>
           </a:solidFill>
           <a:ln/>
         </p:spPr>
@@ -20737,7 +20799,7 @@
                 <a:ea typeface="Outfit" pitchFamily="34" charset="-122"/>
                 <a:cs typeface="Outfit" pitchFamily="34" charset="-120"/>
               </a:rPr>
-              <a:t>What does an exponent mean?</a:t>
+              <a:t>What does it mean to divide by a fraction?</a:t>
             </a:r>
             <a:endParaRPr lang="en-US" sz="1200" dirty="0"/>
           </a:p>
@@ -20758,7 +20820,7 @@
             <a:avLst/>
           </a:prstGeom>
           <a:solidFill>
-            <a:srgbClr val="7A5C8E"/>
+            <a:srgbClr val="2E7D9A"/>
           </a:solidFill>
           <a:ln/>
         </p:spPr>
@@ -20835,7 +20897,7 @@
                 <a:ea typeface="Hanken Grotesk" pitchFamily="34" charset="-122"/>
                 <a:cs typeface="Hanken Grotesk" pitchFamily="34" charset="-120"/>
               </a:rPr>
-              <a:t>Now let's find 5². How many times do we multiply 5 by itself?</a:t>
+              <a:t>Let's try 2 ÷ 1/3. How many 1/3-size pieces fit into 2?</a:t>
             </a:r>
             <a:endParaRPr lang="en-US" sz="1050" dirty="0"/>
           </a:p>
@@ -20856,7 +20918,7 @@
             <a:avLst/>
           </a:prstGeom>
           <a:solidFill>
-            <a:srgbClr val="7A5C8E"/>
+            <a:srgbClr val="2E7D9A"/>
           </a:solidFill>
           <a:ln/>
         </p:spPr>
@@ -20933,7 +20995,7 @@
                 <a:ea typeface="Hanken Grotesk" pitchFamily="34" charset="-122"/>
                 <a:cs typeface="Hanken Grotesk" pitchFamily="34" charset="-120"/>
               </a:rPr>
-              <a:t>The exponent is 2, so we write 5 × 5.</a:t>
+              <a:t>How many thirds are in 1 whole? Three.</a:t>
             </a:r>
             <a:endParaRPr lang="en-US" sz="1050" dirty="0"/>
           </a:p>
@@ -20954,7 +21016,7 @@
             <a:avLst/>
           </a:prstGeom>
           <a:solidFill>
-            <a:srgbClr val="7A5C8E"/>
+            <a:srgbClr val="2E7D9A"/>
           </a:solidFill>
           <a:ln/>
         </p:spPr>
@@ -21031,7 +21093,7 @@
                 <a:ea typeface="Hanken Grotesk" pitchFamily="34" charset="-122"/>
                 <a:cs typeface="Hanken Grotesk" pitchFamily="34" charset="-120"/>
               </a:rPr>
-              <a:t>What is 5 × 5? Yes, 25. So 5² = 25.</a:t>
+              <a:t>We have 2 wholes, so 2 × 3 = 6. That means 2 ÷ 1/3 = 6.</a:t>
             </a:r>
             <a:endParaRPr lang="en-US" sz="1050" dirty="0"/>
           </a:p>
@@ -21207,7 +21269,7 @@
                 <a:ea typeface="Hanken Grotesk" pitchFamily="34" charset="-122"/>
                 <a:cs typeface="Hanken Grotesk" pitchFamily="34" charset="-120"/>
               </a:rPr>
-              <a:t>In the sound studio, the volume doubles each time you flip the switch. Why is the volume after 3 flips 2³ = 8 and not 2 × 3 = 6?</a:t>
+              <a:t>Agent Reyes cuts a 3-foot strip of tape into 1/4-foot sections. Before calculating, will the number of sections be more or less than 3? Why?</a:t>
             </a:r>
             <a:endParaRPr lang="en-US" sz="1000" dirty="0"/>
           </a:p>
@@ -21274,7 +21336,7 @@
             <a:r>
               <a:rPr lang="en-US" sz="950" b="1" dirty="0">
                 <a:solidFill>
-                  <a:srgbClr val="7A5C8E"/>
+                  <a:srgbClr val="2E7D9A"/>
                 </a:solidFill>
                 <a:latin typeface="Outfit" pitchFamily="34" charset="0"/>
                 <a:ea typeface="Outfit" pitchFamily="34" charset="-122"/>
@@ -21319,7 +21381,7 @@
                 <a:ea typeface="Hanken Grotesk" pitchFamily="34" charset="-122"/>
                 <a:cs typeface="Hanken Grotesk" pitchFamily="34" charset="-120"/>
               </a:rPr>
-              <a:t>A power like 2³ is a short way to write repeated multiplication: 2 × 2 × 2.</a:t>
+              <a:t>Dividing by a fraction smaller than 1 gives an answer BIGGER than what you started with, because many tiny pieces fit inside.</a:t>
             </a:r>
             <a:endParaRPr lang="en-US" sz="950" dirty="0"/>
           </a:p>

--- a/lessons/6-1/slides.pptx
+++ b/lessons/6-1/slides.pptx
@@ -694,7 +694,7 @@
           <a:p>
             <a:r>
               <a:rPr lang="en-US" dirty="0"/>
-              <a:t>Answer key — 4 ÷ 1/5 means 'how many 1/5-size pieces fit into 4,' not '1/5 of 4.' The correct answer is 4 × 5 = 20.</a:t>
+              <a:t>Answer key — 4 ÷ 1/5 is not "1/5 of 4." Put a 1 under the 4 and flip the divisor: 4/1 × 5/1 = 20.</a:t>
             </a:r>
             <a:endParaRPr lang="en-US" dirty="0"/>
           </a:p>
@@ -2334,7 +2334,7 @@
             <a:avLst/>
           </a:prstGeom>
           <a:solidFill>
-            <a:srgbClr val="2E7D9A">
+            <a:srgbClr val="7A5C8E">
               <a:alpha val="35000"/>
             </a:srgbClr>
           </a:solidFill>
@@ -2452,7 +2452,7 @@
                 <a:ea typeface="Outfit" pitchFamily="34" charset="-122"/>
                 <a:cs typeface="Outfit" pitchFamily="34" charset="-120"/>
               </a:rPr>
-              <a:t>Interpret Division of Fractions</a:t>
+              <a:t>Division Expressions with Fractions and Whole Numbers</a:t>
             </a:r>
             <a:endParaRPr lang="en-US" sz="3000" dirty="0"/>
           </a:p>
@@ -2475,7 +2475,7 @@
             </a:avLst>
           </a:prstGeom>
           <a:solidFill>
-            <a:srgbClr val="2E7D9A"/>
+            <a:srgbClr val="7A5C8E"/>
           </a:solidFill>
           <a:ln/>
         </p:spPr>
@@ -2534,7 +2534,7 @@
                 <a:ea typeface="Hanken Grotesk" pitchFamily="34" charset="-122"/>
                 <a:cs typeface="Hanken Grotesk" pitchFamily="34" charset="-120"/>
               </a:rPr>
-              <a:t>Unit 2  ·  Lesson 2-1</a:t>
+              <a:t>Unit 6  ·  Lesson 6-1</a:t>
             </a:r>
             <a:endParaRPr lang="en-US" sz="1000" dirty="0"/>
           </a:p>
@@ -2860,7 +2860,7 @@
             <a:r>
               <a:rPr lang="en-US" sz="1100" b="1" dirty="0">
                 <a:solidFill>
-                  <a:srgbClr val="2E7D9A"/>
+                  <a:srgbClr val="7A5C8E"/>
                 </a:solidFill>
                 <a:latin typeface="Outfit" pitchFamily="34" charset="0"/>
                 <a:ea typeface="Outfit" pitchFamily="34" charset="-122"/>
@@ -2919,7 +2919,7 @@
                 <a:ea typeface="Hanken Grotesk" pitchFamily="34" charset="-122"/>
                 <a:cs typeface="Hanken Grotesk" pitchFamily="34" charset="-120"/>
               </a:rPr>
-              <a:t>I can use models to interpret what it means to divide by a fraction.</a:t>
+              <a:t>I can divide a whole number by a unit fraction and divide a fraction by a whole number by writing the whole number over 1 and using Keep, Change, Flip.</a:t>
             </a:r>
             <a:endParaRPr lang="en-US" sz="1100" dirty="0"/>
           </a:p>
@@ -2986,7 +2986,7 @@
             <a:r>
               <a:rPr lang="en-US" sz="1100" b="1" dirty="0">
                 <a:solidFill>
-                  <a:srgbClr val="2E7D9A"/>
+                  <a:srgbClr val="7A5C8E"/>
                 </a:solidFill>
                 <a:latin typeface="Outfit" pitchFamily="34" charset="0"/>
                 <a:ea typeface="Outfit" pitchFamily="34" charset="-122"/>
@@ -3045,7 +3045,7 @@
                 <a:ea typeface="Hanken Grotesk" pitchFamily="34" charset="-122"/>
                 <a:cs typeface="Hanken Grotesk" pitchFamily="34" charset="-120"/>
               </a:rPr>
-              <a:t>I can explain a fraction division using the words dividend, divisor, quotient, reciprocal, and unit fraction.</a:t>
+              <a:t>I can explain each step of Keep, Change, Flip using the words reciprocal, divisor, and quotient.</a:t>
             </a:r>
             <a:endParaRPr lang="en-US" sz="1050" dirty="0"/>
           </a:p>
@@ -3198,7 +3198,7 @@
             </a:avLst>
           </a:prstGeom>
           <a:solidFill>
-            <a:srgbClr val="2E7D9A"/>
+            <a:srgbClr val="7A5C8E"/>
           </a:solidFill>
           <a:ln/>
         </p:spPr>
@@ -3437,7 +3437,7 @@
                 <a:ea typeface="Hanken Grotesk" pitchFamily="34" charset="-122"/>
                 <a:cs typeface="Hanken Grotesk" pitchFamily="34" charset="-120"/>
               </a:rPr>
-              <a:t>Reveal Math Grade 6  ·  Unit 2  ·  Lesson 2-1</a:t>
+              <a:t>Reveal Math Grade 6  ·  Unit 6  ·  Lesson 6-1</a:t>
             </a:r>
             <a:endParaRPr lang="en-US" sz="750" dirty="0"/>
           </a:p>
@@ -3549,7 +3549,7 @@
                 <a:ea typeface="Outfit" pitchFamily="34" charset="-122"/>
                 <a:cs typeface="Outfit" pitchFamily="34" charset="-120"/>
               </a:rPr>
-              <a:t>Use the bar model to see how many 1/4-size pieces fit into 3 wholes.</a:t>
+              <a:t>Use the bar model to see how many 1/3-size pieces fit into 2 wholes.</a:t>
             </a:r>
             <a:endParaRPr lang="en-US" sz="1050" dirty="0"/>
           </a:p>
@@ -3803,7 +3803,7 @@
           </a:solidFill>
           <a:ln w="12700">
             <a:solidFill>
-              <a:srgbClr val="2E7D9A"/>
+              <a:srgbClr val="7A5C8E"/>
             </a:solidFill>
             <a:prstDash val="solid"/>
           </a:ln>
@@ -3831,7 +3831,7 @@
             <a:avLst/>
           </a:prstGeom>
           <a:solidFill>
-            <a:srgbClr val="2E7D9A"/>
+            <a:srgbClr val="7A5C8E"/>
           </a:solidFill>
           <a:ln/>
         </p:spPr>
@@ -3878,7 +3878,7 @@
           </a:solidFill>
           <a:ln w="12700">
             <a:solidFill>
-              <a:srgbClr val="2E7D9A"/>
+              <a:srgbClr val="7A5C8E"/>
             </a:solidFill>
             <a:prstDash val="solid"/>
           </a:ln>
@@ -3906,7 +3906,7 @@
             <a:avLst/>
           </a:prstGeom>
           <a:solidFill>
-            <a:srgbClr val="2E7D9A"/>
+            <a:srgbClr val="7A5C8E"/>
           </a:solidFill>
           <a:ln/>
         </p:spPr>
@@ -4308,7 +4308,7 @@
             </a:avLst>
           </a:prstGeom>
           <a:solidFill>
-            <a:srgbClr val="2E7D9A"/>
+            <a:srgbClr val="7A5C8E"/>
           </a:solidFill>
           <a:ln/>
         </p:spPr>
@@ -4547,7 +4547,7 @@
                 <a:ea typeface="Hanken Grotesk" pitchFamily="34" charset="-122"/>
                 <a:cs typeface="Hanken Grotesk" pitchFamily="34" charset="-120"/>
               </a:rPr>
-              <a:t>Reveal Math Grade 6  ·  Unit 2  ·  Lesson 2-1</a:t>
+              <a:t>Reveal Math Grade 6  ·  Unit 6  ·  Lesson 6-1</a:t>
             </a:r>
             <a:endParaRPr lang="en-US" sz="750" dirty="0"/>
           </a:p>
@@ -5577,7 +5577,7 @@
             </a:avLst>
           </a:prstGeom>
           <a:solidFill>
-            <a:srgbClr val="2E7D9A"/>
+            <a:srgbClr val="7A5C8E"/>
           </a:solidFill>
           <a:ln/>
         </p:spPr>
@@ -5816,7 +5816,7 @@
                 <a:ea typeface="Hanken Grotesk" pitchFamily="34" charset="-122"/>
                 <a:cs typeface="Hanken Grotesk" pitchFamily="34" charset="-120"/>
               </a:rPr>
-              <a:t>Reveal Math Grade 6  ·  Unit 2  ·  Lesson 2-1</a:t>
+              <a:t>Reveal Math Grade 6  ·  Unit 6  ·  Lesson 6-1</a:t>
             </a:r>
             <a:endParaRPr lang="en-US" sz="750" dirty="0"/>
           </a:p>
@@ -5951,7 +5951,7 @@
             <a:avLst/>
           </a:prstGeom>
           <a:solidFill>
-            <a:srgbClr val="2E7D9A"/>
+            <a:srgbClr val="7A5C8E"/>
           </a:solidFill>
           <a:ln/>
         </p:spPr>
@@ -6028,7 +6028,7 @@
                 <a:ea typeface="Hanken Grotesk" pitchFamily="34" charset="-122"/>
                 <a:cs typeface="Hanken Grotesk" pitchFamily="34" charset="-120"/>
               </a:rPr>
-              <a:t>I want to cut a 3-foot strip of tape into 1/4-foot pieces. I ask: how many 1/4-foot pieces fit into 3 feet?</a:t>
+              <a:t>I want to cut a 3-foot strip of tape into 1/4-foot pieces, so I write 3 ÷ 1/4.</a:t>
             </a:r>
             <a:endParaRPr lang="en-US" sz="1050" dirty="0"/>
           </a:p>
@@ -6049,7 +6049,7 @@
             <a:avLst/>
           </a:prstGeom>
           <a:solidFill>
-            <a:srgbClr val="2E7D9A"/>
+            <a:srgbClr val="7A5C8E"/>
           </a:solidFill>
           <a:ln/>
         </p:spPr>
@@ -6126,7 +6126,7 @@
                 <a:ea typeface="Hanken Grotesk" pitchFamily="34" charset="-122"/>
                 <a:cs typeface="Hanken Grotesk" pitchFamily="34" charset="-120"/>
               </a:rPr>
-              <a:t>First I look at just 1 foot. How many 1/4-foot pieces fit in 1 foot? Four, because 4 fourths make one whole.</a:t>
+              <a:t>The 3 is a whole number, so I put a 1 under it. Now both numbers are fractions: 3/1 ÷ 1/4.</a:t>
             </a:r>
             <a:endParaRPr lang="en-US" sz="1050" dirty="0"/>
           </a:p>
@@ -6147,7 +6147,7 @@
             <a:avLst/>
           </a:prstGeom>
           <a:solidFill>
-            <a:srgbClr val="2E7D9A"/>
+            <a:srgbClr val="7A5C8E"/>
           </a:solidFill>
           <a:ln/>
         </p:spPr>
@@ -6224,7 +6224,7 @@
                 <a:ea typeface="Hanken Grotesk" pitchFamily="34" charset="-122"/>
                 <a:cs typeface="Hanken Grotesk" pitchFamily="34" charset="-120"/>
               </a:rPr>
-              <a:t>Now I have 3 feet. So I do 3 groups of 4: 3 × 4 = 12.</a:t>
+              <a:t>Keep, Change, Flip. I keep 3/1, I change ÷ to ×, and I flip 1/4 to 4/1. That gives 3/1 × 4/1.</a:t>
             </a:r>
             <a:endParaRPr lang="en-US" sz="1050" dirty="0"/>
           </a:p>
@@ -6245,7 +6245,7 @@
             <a:avLst/>
           </a:prstGeom>
           <a:solidFill>
-            <a:srgbClr val="2E7D9A"/>
+            <a:srgbClr val="7A5C8E"/>
           </a:solidFill>
           <a:ln/>
         </p:spPr>
@@ -6322,7 +6322,7 @@
                 <a:ea typeface="Hanken Grotesk" pitchFamily="34" charset="-122"/>
                 <a:cs typeface="Hanken Grotesk" pitchFamily="34" charset="-120"/>
               </a:rPr>
-              <a:t>So 3 ÷ 1/4 = 12. There are 12 pieces. The answer is bigger than 3 because each piece is very small.</a:t>
+              <a:t>I multiply across: 3 × 4 = 12 on top and 1 × 1 = 1 on the bottom, so 3 ÷ 1/4 = 3/1 × 4/1 = 12 pieces.</a:t>
             </a:r>
             <a:endParaRPr lang="en-US" sz="1050" dirty="0"/>
           </a:p>
@@ -6773,7 +6773,7 @@
             </a:avLst>
           </a:prstGeom>
           <a:solidFill>
-            <a:srgbClr val="2E7D9A"/>
+            <a:srgbClr val="7A5C8E"/>
           </a:solidFill>
           <a:ln/>
         </p:spPr>
@@ -7012,7 +7012,7 @@
                 <a:ea typeface="Hanken Grotesk" pitchFamily="34" charset="-122"/>
                 <a:cs typeface="Hanken Grotesk" pitchFamily="34" charset="-120"/>
               </a:rPr>
-              <a:t>Reveal Math Grade 6  ·  Unit 2  ·  Lesson 2-1</a:t>
+              <a:t>Reveal Math Grade 6  ·  Unit 6  ·  Lesson 6-1</a:t>
             </a:r>
             <a:endParaRPr lang="en-US" sz="750" dirty="0"/>
           </a:p>
@@ -7238,7 +7238,7 @@
                 <a:ea typeface="Hanken Grotesk" pitchFamily="34" charset="-122"/>
                 <a:cs typeface="Hanken Grotesk" pitchFamily="34" charset="-120"/>
               </a:rPr>
-              <a:t>Sketch a model for today's problem. Label it using Dividend and Divisor.</a:t>
+              <a:t>Sketch a model for today's problem. Label it using Division of Fractions and Reciprocal.</a:t>
             </a:r>
             <a:endParaRPr lang="en-US" sz="1000" dirty="0"/>
           </a:p>
@@ -7386,7 +7386,7 @@
                 <a:ea typeface="Hanken Grotesk" pitchFamily="34" charset="-122"/>
                 <a:cs typeface="Hanken Grotesk" pitchFamily="34" charset="-120"/>
               </a:rPr>
-              <a:t>In 2–3 sentences, explain "Dividing by a fraction smaller than 1 gives an answer BIGGER than what you started with, because many tiny pieces fit inside." in your own words.</a:t>
+              <a:t>In 2–3 sentences, explain "Dividing Whole Numbers &amp; Fractions. 1. Put a 1 under the whole number: 3 ÷ 1/4 = 3/1 ÷ 1/4. 2. Keep, Change, Flip: 3/1 ÷ 1/4 = 3/1 × 4/1. 3. Multiply across: 3/1 × 4/1 = 12/1 = 12" in your own words.</a:t>
             </a:r>
             <a:endParaRPr lang="en-US" sz="1000" dirty="0"/>
           </a:p>
@@ -7682,7 +7682,7 @@
                 <a:ea typeface="Hanken Grotesk" pitchFamily="34" charset="-122"/>
                 <a:cs typeface="Hanken Grotesk" pitchFamily="34" charset="-120"/>
               </a:rPr>
-              <a:t>Write your own problem that uses Dividend, then solve it and make an answer key.</a:t>
+              <a:t>Write your own problem that uses Division of Fractions, then solve it and make an answer key.</a:t>
             </a:r>
             <a:endParaRPr lang="en-US" sz="1000" dirty="0"/>
           </a:p>
@@ -7835,7 +7835,7 @@
             </a:avLst>
           </a:prstGeom>
           <a:solidFill>
-            <a:srgbClr val="2E7D9A"/>
+            <a:srgbClr val="7A5C8E"/>
           </a:solidFill>
           <a:ln/>
         </p:spPr>
@@ -8074,7 +8074,7 @@
                 <a:ea typeface="Hanken Grotesk" pitchFamily="34" charset="-122"/>
                 <a:cs typeface="Hanken Grotesk" pitchFamily="34" charset="-120"/>
               </a:rPr>
-              <a:t>Reveal Math Grade 6  ·  Unit 2  ·  Lesson 2-1</a:t>
+              <a:t>Reveal Math Grade 6  ·  Unit 6  ·  Lesson 6-1</a:t>
             </a:r>
             <a:endParaRPr lang="en-US" sz="750" dirty="0"/>
           </a:p>
@@ -8170,7 +8170,7 @@
             </a:avLst>
           </a:prstGeom>
           <a:solidFill>
-            <a:srgbClr val="2E7D9A"/>
+            <a:srgbClr val="7A5C8E"/>
           </a:solidFill>
           <a:ln/>
         </p:spPr>
@@ -8223,7 +8223,7 @@
             <a:r>
               <a:rPr lang="en-US" sz="1050" b="1" dirty="0">
                 <a:solidFill>
-                  <a:srgbClr val="2E7D9A"/>
+                  <a:srgbClr val="7A5C8E"/>
                 </a:solidFill>
                 <a:latin typeface="Hanken Grotesk" pitchFamily="34" charset="0"/>
                 <a:ea typeface="Hanken Grotesk" pitchFamily="34" charset="-122"/>
@@ -8299,7 +8299,7 @@
             <a:r>
               <a:rPr lang="en-US" sz="1050" b="1" dirty="0">
                 <a:solidFill>
-                  <a:srgbClr val="2E7D9A"/>
+                  <a:srgbClr val="7A5C8E"/>
                 </a:solidFill>
                 <a:latin typeface="Hanken Grotesk" pitchFamily="34" charset="0"/>
                 <a:ea typeface="Hanken Grotesk" pitchFamily="34" charset="-122"/>
@@ -8319,7 +8319,7 @@
                 <a:ea typeface="Hanken Grotesk" pitchFamily="34" charset="-122"/>
                 <a:cs typeface="Hanken Grotesk" pitchFamily="34" charset="-120"/>
               </a:rPr>
-              <a:t>What does 3 ÷ 1/4 mean?</a:t>
+              <a:t>A 5/6-mile stretch of the evidence trail is split equally among 3 search teams. How much of a mile does each team walk?</a:t>
             </a:r>
             <a:endParaRPr lang="en-US" sz="1050" dirty="0"/>
           </a:p>
@@ -8375,7 +8375,7 @@
             <a:r>
               <a:rPr lang="en-US" sz="1050" b="1" dirty="0">
                 <a:solidFill>
-                  <a:srgbClr val="2E7D9A"/>
+                  <a:srgbClr val="7A5C8E"/>
                 </a:solidFill>
                 <a:latin typeface="Hanken Grotesk" pitchFamily="34" charset="0"/>
                 <a:ea typeface="Hanken Grotesk" pitchFamily="34" charset="-122"/>
@@ -8395,7 +8395,7 @@
                 <a:ea typeface="Hanken Grotesk" pitchFamily="34" charset="-122"/>
                 <a:cs typeface="Hanken Grotesk" pitchFamily="34" charset="-120"/>
               </a:rPr>
-              <a:t>Which expression means 'how many 1/3-size pieces are in 2'?</a:t>
+              <a:t>What does 3 ÷ 1/4 mean?</a:t>
             </a:r>
             <a:endParaRPr lang="en-US" sz="1050" dirty="0"/>
           </a:p>
@@ -8800,7 +8800,7 @@
             </a:avLst>
           </a:prstGeom>
           <a:solidFill>
-            <a:srgbClr val="2E7D9A"/>
+            <a:srgbClr val="7A5C8E"/>
           </a:solidFill>
           <a:ln/>
         </p:spPr>
@@ -9039,7 +9039,7 @@
                 <a:ea typeface="Hanken Grotesk" pitchFamily="34" charset="-122"/>
                 <a:cs typeface="Hanken Grotesk" pitchFamily="34" charset="-120"/>
               </a:rPr>
-              <a:t>Reveal Math Grade 6  ·  Unit 2  ·  Lesson 2-1</a:t>
+              <a:t>Reveal Math Grade 6  ·  Unit 6  ·  Lesson 6-1</a:t>
             </a:r>
             <a:endParaRPr lang="en-US" sz="750" dirty="0"/>
           </a:p>
@@ -9198,7 +9198,7 @@
             <a:r>
               <a:rPr lang="en-US" sz="1100" b="1" dirty="0">
                 <a:solidFill>
-                  <a:srgbClr val="2E7D9A"/>
+                  <a:srgbClr val="7A5C8E"/>
                 </a:solidFill>
                 <a:latin typeface="Outfit" pitchFamily="34" charset="0"/>
                 <a:ea typeface="Outfit" pitchFamily="34" charset="-122"/>
@@ -9243,7 +9243,7 @@
                 <a:ea typeface="Hanken Grotesk" pitchFamily="34" charset="-122"/>
                 <a:cs typeface="Hanken Grotesk" pitchFamily="34" charset="-120"/>
               </a:rPr>
-              <a:t>Today's key idea is "Dividing by a fraction smaller than 1 gives an answer BIGGER than what you started with, because many tiny pieces fit inside." — and it works because ___.</a:t>
+              <a:t>Today's key idea is "Dividing Whole Numbers &amp; Fractions. 1. Put a 1 under the whole number: 3 ÷ 1/4 = 3/1 ÷ 1/4. 2. Keep, Change, Flip: 3/1 ÷ 1/4 = 3/1 × 4/1. 3. Multiply across: 3/1 × 4/1 = 12/1 = 12" — and it works because ___.</a:t>
             </a:r>
             <a:endParaRPr lang="en-US" sz="1050" dirty="0"/>
           </a:p>
@@ -9347,7 +9347,7 @@
             <a:r>
               <a:rPr lang="en-US" sz="1100" b="1" dirty="0">
                 <a:solidFill>
-                  <a:srgbClr val="2E7D9A"/>
+                  <a:srgbClr val="7A5C8E"/>
                 </a:solidFill>
                 <a:latin typeface="Outfit" pitchFamily="34" charset="0"/>
                 <a:ea typeface="Outfit" pitchFamily="34" charset="-122"/>
@@ -9392,7 +9392,7 @@
                 <a:ea typeface="Hanken Grotesk" pitchFamily="34" charset="-122"/>
                 <a:cs typeface="Hanken Grotesk" pitchFamily="34" charset="-120"/>
               </a:rPr>
-              <a:t>Because Dividend means ___, but a tricky part is ___, so I have to ___.</a:t>
+              <a:t>Because Division of Fractions means ___, but a tricky part is ___, so I have to ___.</a:t>
             </a:r>
             <a:endParaRPr lang="en-US" sz="1050" dirty="0"/>
           </a:p>
@@ -9496,7 +9496,7 @@
             <a:r>
               <a:rPr lang="en-US" sz="1100" b="1" dirty="0">
                 <a:solidFill>
-                  <a:srgbClr val="2E7D9A"/>
+                  <a:srgbClr val="7A5C8E"/>
                 </a:solidFill>
                 <a:latin typeface="Outfit" pitchFamily="34" charset="0"/>
                 <a:ea typeface="Outfit" pitchFamily="34" charset="-122"/>
@@ -9541,7 +9541,7 @@
                 <a:ea typeface="Hanken Grotesk" pitchFamily="34" charset="-122"/>
                 <a:cs typeface="Hanken Grotesk" pitchFamily="34" charset="-120"/>
               </a:rPr>
-              <a:t>A common mistake with Dividend is ___. It happens because ___, and the fix is ___.</a:t>
+              <a:t>A common mistake with Division of Fractions is ___. It happens because ___, and the fix is ___.</a:t>
             </a:r>
             <a:endParaRPr lang="en-US" sz="1050" dirty="0"/>
           </a:p>
@@ -9717,7 +9717,7 @@
             </a:avLst>
           </a:prstGeom>
           <a:solidFill>
-            <a:srgbClr val="2E7D9A"/>
+            <a:srgbClr val="7A5C8E"/>
           </a:solidFill>
           <a:ln/>
         </p:spPr>
@@ -9956,7 +9956,7 @@
                 <a:ea typeface="Hanken Grotesk" pitchFamily="34" charset="-122"/>
                 <a:cs typeface="Hanken Grotesk" pitchFamily="34" charset="-120"/>
               </a:rPr>
-              <a:t>Reveal Math Grade 6  ·  Unit 2  ·  Lesson 2-1</a:t>
+              <a:t>Reveal Math Grade 6  ·  Unit 6  ·  Lesson 6-1</a:t>
             </a:r>
             <a:endParaRPr lang="en-US" sz="750" dirty="0"/>
           </a:p>
@@ -10394,7 +10394,7 @@
             <a:r>
               <a:rPr lang="en-US" sz="1050" b="1" dirty="0">
                 <a:solidFill>
-                  <a:srgbClr val="2E7D9A"/>
+                  <a:srgbClr val="7A5C8E"/>
                 </a:solidFill>
                 <a:latin typeface="Hanken Grotesk" pitchFamily="34" charset="0"/>
                 <a:ea typeface="Hanken Grotesk" pitchFamily="34" charset="-122"/>
@@ -10492,7 +10492,7 @@
                 <a:ea typeface="Hanken Grotesk" pitchFamily="34" charset="-122"/>
                 <a:cs typeface="Hanken Grotesk" pitchFamily="34" charset="-120"/>
               </a:rPr>
-              <a:t>B.  5 groups of 1/4; quotient is 5/4</a:t>
+              <a:t>B.  1/4 of 5; quotient is 5/4</a:t>
             </a:r>
             <a:endParaRPr lang="en-US" sz="1000" dirty="0"/>
           </a:p>
@@ -10531,7 +10531,7 @@
                 <a:ea typeface="Hanken Grotesk" pitchFamily="34" charset="-122"/>
                 <a:cs typeface="Hanken Grotesk" pitchFamily="34" charset="-120"/>
               </a:rPr>
-              <a:t>C.  1/4 of 5; quotient is 5/4</a:t>
+              <a:t>C.  5 groups of 1/4; quotient is 5/4</a:t>
             </a:r>
             <a:endParaRPr lang="en-US" sz="1000" dirty="0"/>
           </a:p>
@@ -10603,7 +10603,7 @@
             <a:r>
               <a:rPr lang="en-US" sz="1050" b="1" dirty="0">
                 <a:solidFill>
-                  <a:srgbClr val="2E7D9A"/>
+                  <a:srgbClr val="7A5C8E"/>
                 </a:solidFill>
                 <a:latin typeface="Hanken Grotesk" pitchFamily="34" charset="0"/>
                 <a:ea typeface="Hanken Grotesk" pitchFamily="34" charset="-122"/>
@@ -10845,7 +10845,7 @@
             </a:avLst>
           </a:prstGeom>
           <a:solidFill>
-            <a:srgbClr val="2E7D9A"/>
+            <a:srgbClr val="7A5C8E"/>
           </a:solidFill>
           <a:ln/>
         </p:spPr>
@@ -11084,7 +11084,7 @@
                 <a:ea typeface="Hanken Grotesk" pitchFamily="34" charset="-122"/>
                 <a:cs typeface="Hanken Grotesk" pitchFamily="34" charset="-120"/>
               </a:rPr>
-              <a:t>Reveal Math Grade 6  ·  Unit 2  ·  Lesson 2-1</a:t>
+              <a:t>Reveal Math Grade 6  ·  Unit 6  ·  Lesson 6-1</a:t>
             </a:r>
             <a:endParaRPr lang="en-US" sz="750" dirty="0"/>
           </a:p>
@@ -11198,7 +11198,7 @@
                 <a:ea typeface="Hanken Grotesk" pitchFamily="34" charset="-122"/>
                 <a:cs typeface="Hanken Grotesk" pitchFamily="34" charset="-120"/>
               </a:rPr>
-              <a:t>I can use models to interpret what it means to divide by a fraction.</a:t>
+              <a:t>I can divide a whole number by a unit fraction and divide a fraction by a whole number by writing the whole number over 1 and using Keep, Change, Flip.</a:t>
             </a:r>
             <a:endParaRPr lang="en-US" sz="1100" dirty="0"/>
           </a:p>
@@ -11253,7 +11253,7 @@
             <a:avLst/>
           </a:prstGeom>
           <a:solidFill>
-            <a:srgbClr val="2E7D9A"/>
+            <a:srgbClr val="7A5C8E"/>
           </a:solidFill>
           <a:ln/>
         </p:spPr>
@@ -11463,7 +11463,7 @@
             <a:avLst/>
           </a:prstGeom>
           <a:solidFill>
-            <a:srgbClr val="2E7D9A"/>
+            <a:srgbClr val="7A5C8E"/>
           </a:solidFill>
           <a:ln/>
         </p:spPr>
@@ -11673,7 +11673,7 @@
             <a:avLst/>
           </a:prstGeom>
           <a:solidFill>
-            <a:srgbClr val="2E7D9A"/>
+            <a:srgbClr val="7A5C8E"/>
           </a:solidFill>
           <a:ln/>
         </p:spPr>
@@ -11883,7 +11883,7 @@
             <a:avLst/>
           </a:prstGeom>
           <a:solidFill>
-            <a:srgbClr val="2E7D9A"/>
+            <a:srgbClr val="7A5C8E"/>
           </a:solidFill>
           <a:ln/>
         </p:spPr>
@@ -12105,7 +12105,7 @@
             <a:r>
               <a:rPr lang="en-US" sz="1050" b="1" dirty="0">
                 <a:solidFill>
-                  <a:srgbClr val="2E7D9A"/>
+                  <a:srgbClr val="7A5C8E"/>
                 </a:solidFill>
                 <a:latin typeface="Hanken Grotesk" pitchFamily="34" charset="0"/>
                 <a:ea typeface="Hanken Grotesk" pitchFamily="34" charset="-122"/>
@@ -12278,7 +12278,7 @@
             </a:avLst>
           </a:prstGeom>
           <a:solidFill>
-            <a:srgbClr val="2E7D9A"/>
+            <a:srgbClr val="7A5C8E"/>
           </a:solidFill>
           <a:ln/>
         </p:spPr>
@@ -12517,7 +12517,7 @@
                 <a:ea typeface="Hanken Grotesk" pitchFamily="34" charset="-122"/>
                 <a:cs typeface="Hanken Grotesk" pitchFamily="34" charset="-120"/>
               </a:rPr>
-              <a:t>Reveal Math Grade 6  ·  Unit 2  ·  Lesson 2-1</a:t>
+              <a:t>Reveal Math Grade 6  ·  Unit 6  ·  Lesson 6-1</a:t>
             </a:r>
             <a:endParaRPr lang="en-US" sz="750" dirty="0"/>
           </a:p>
@@ -12652,7 +12652,7 @@
             </a:avLst>
           </a:prstGeom>
           <a:solidFill>
-            <a:srgbClr val="2E7D9A"/>
+            <a:srgbClr val="7A5C8E"/>
           </a:solidFill>
           <a:ln/>
         </p:spPr>
@@ -12705,7 +12705,7 @@
             <a:r>
               <a:rPr lang="en-US" sz="1300" b="1" dirty="0">
                 <a:solidFill>
-                  <a:srgbClr val="2E7D9A"/>
+                  <a:srgbClr val="7A5C8E"/>
                 </a:solidFill>
                 <a:latin typeface="Outfit" pitchFamily="34" charset="0"/>
                 <a:ea typeface="Outfit" pitchFamily="34" charset="-122"/>
@@ -12767,7 +12767,7 @@
                 <a:ea typeface="Hanken Grotesk" pitchFamily="34" charset="-122"/>
                 <a:cs typeface="Hanken Grotesk" pitchFamily="34" charset="-120"/>
               </a:rPr>
-              <a:t>I can use models to interpret what it means to divide by a fraction.</a:t>
+              <a:t>I can divide a whole number by a unit fraction and divide a fraction by a whole number by writing the whole number over 1 and using Keep, Change, Flip.</a:t>
             </a:r>
             <a:endParaRPr lang="en-US" sz="1800" dirty="0"/>
           </a:p>
@@ -12824,7 +12824,7 @@
             </a:avLst>
           </a:prstGeom>
           <a:solidFill>
-            <a:srgbClr val="2E7D9A"/>
+            <a:srgbClr val="7A5C8E"/>
           </a:solidFill>
           <a:ln/>
         </p:spPr>
@@ -12877,7 +12877,7 @@
             <a:r>
               <a:rPr lang="en-US" sz="1300" b="1" dirty="0">
                 <a:solidFill>
-                  <a:srgbClr val="2E7D9A"/>
+                  <a:srgbClr val="7A5C8E"/>
                 </a:solidFill>
                 <a:latin typeface="Outfit" pitchFamily="34" charset="0"/>
                 <a:ea typeface="Outfit" pitchFamily="34" charset="-122"/>
@@ -12939,7 +12939,7 @@
                 <a:ea typeface="Hanken Grotesk" pitchFamily="34" charset="-122"/>
                 <a:cs typeface="Hanken Grotesk" pitchFamily="34" charset="-120"/>
               </a:rPr>
-              <a:t>I can explain a fraction division using the words dividend, divisor, quotient, reciprocal, and unit fraction.</a:t>
+              <a:t>I can explain each step of Keep, Change, Flip using the words reciprocal, divisor, and quotient.</a:t>
             </a:r>
             <a:endParaRPr lang="en-US" sz="1700" dirty="0"/>
           </a:p>
@@ -13092,7 +13092,7 @@
             </a:avLst>
           </a:prstGeom>
           <a:solidFill>
-            <a:srgbClr val="2E7D9A"/>
+            <a:srgbClr val="7A5C8E"/>
           </a:solidFill>
           <a:ln/>
         </p:spPr>
@@ -13331,7 +13331,7 @@
                 <a:ea typeface="Hanken Grotesk" pitchFamily="34" charset="-122"/>
                 <a:cs typeface="Hanken Grotesk" pitchFamily="34" charset="-120"/>
               </a:rPr>
-              <a:t>Reveal Math Grade 6  ·  Unit 2  ·  Lesson 2-1</a:t>
+              <a:t>Reveal Math Grade 6  ·  Unit 6  ·  Lesson 6-1</a:t>
             </a:r>
             <a:endParaRPr lang="en-US" sz="750" dirty="0"/>
           </a:p>
@@ -13427,7 +13427,7 @@
             </a:avLst>
           </a:prstGeom>
           <a:solidFill>
-            <a:srgbClr val="2E7D9A"/>
+            <a:srgbClr val="7A5C8E"/>
           </a:solidFill>
           <a:ln/>
         </p:spPr>
@@ -14105,7 +14105,7 @@
             </a:avLst>
           </a:prstGeom>
           <a:solidFill>
-            <a:srgbClr val="2E7D9A"/>
+            <a:srgbClr val="7A5C8E"/>
           </a:solidFill>
           <a:ln/>
         </p:spPr>
@@ -14344,7 +14344,7 @@
                 <a:ea typeface="Hanken Grotesk" pitchFamily="34" charset="-122"/>
                 <a:cs typeface="Hanken Grotesk" pitchFamily="34" charset="-120"/>
               </a:rPr>
-              <a:t>Reveal Math Grade 6  ·  Unit 2  ·  Lesson 2-1</a:t>
+              <a:t>Reveal Math Grade 6  ·  Unit 6  ·  Lesson 6-1</a:t>
             </a:r>
             <a:endParaRPr lang="en-US" sz="750" dirty="0"/>
           </a:p>
@@ -14440,7 +14440,7 @@
             </a:avLst>
           </a:prstGeom>
           <a:solidFill>
-            <a:srgbClr val="2E7D9A"/>
+            <a:srgbClr val="7A5C8E"/>
           </a:solidFill>
           <a:ln/>
         </p:spPr>
@@ -15165,7 +15165,7 @@
             </a:avLst>
           </a:prstGeom>
           <a:solidFill>
-            <a:srgbClr val="2E7D9A"/>
+            <a:srgbClr val="7A5C8E"/>
           </a:solidFill>
           <a:ln/>
         </p:spPr>
@@ -15404,7 +15404,7 @@
                 <a:ea typeface="Hanken Grotesk" pitchFamily="34" charset="-122"/>
                 <a:cs typeface="Hanken Grotesk" pitchFamily="34" charset="-120"/>
               </a:rPr>
-              <a:t>Reveal Math Grade 6  ·  Unit 2  ·  Lesson 2-1</a:t>
+              <a:t>Reveal Math Grade 6  ·  Unit 6  ·  Lesson 6-1</a:t>
             </a:r>
             <a:endParaRPr lang="en-US" sz="750" dirty="0"/>
           </a:p>
@@ -15500,7 +15500,7 @@
             </a:avLst>
           </a:prstGeom>
           <a:solidFill>
-            <a:srgbClr val="2E7D9A"/>
+            <a:srgbClr val="7A5C8E"/>
           </a:solidFill>
           <a:ln/>
         </p:spPr>
@@ -16178,7 +16178,7 @@
             </a:avLst>
           </a:prstGeom>
           <a:solidFill>
-            <a:srgbClr val="2E7D9A"/>
+            <a:srgbClr val="7A5C8E"/>
           </a:solidFill>
           <a:ln/>
         </p:spPr>
@@ -16417,7 +16417,7 @@
                 <a:ea typeface="Hanken Grotesk" pitchFamily="34" charset="-122"/>
                 <a:cs typeface="Hanken Grotesk" pitchFamily="34" charset="-120"/>
               </a:rPr>
-              <a:t>Reveal Math Grade 6  ·  Unit 2  ·  Lesson 2-1</a:t>
+              <a:t>Reveal Math Grade 6  ·  Unit 6  ·  Lesson 6-1</a:t>
             </a:r>
             <a:endParaRPr lang="en-US" sz="750" dirty="0"/>
           </a:p>
@@ -16513,7 +16513,7 @@
             </a:avLst>
           </a:prstGeom>
           <a:solidFill>
-            <a:srgbClr val="2E7D9A"/>
+            <a:srgbClr val="7A5C8E"/>
           </a:solidFill>
           <a:ln/>
         </p:spPr>
@@ -17238,7 +17238,7 @@
             </a:avLst>
           </a:prstGeom>
           <a:solidFill>
-            <a:srgbClr val="2E7D9A"/>
+            <a:srgbClr val="7A5C8E"/>
           </a:solidFill>
           <a:ln/>
         </p:spPr>
@@ -17477,7 +17477,7 @@
                 <a:ea typeface="Hanken Grotesk" pitchFamily="34" charset="-122"/>
                 <a:cs typeface="Hanken Grotesk" pitchFamily="34" charset="-120"/>
               </a:rPr>
-              <a:t>Reveal Math Grade 6  ·  Unit 2  ·  Lesson 2-1</a:t>
+              <a:t>Reveal Math Grade 6  ·  Unit 6  ·  Lesson 6-1</a:t>
             </a:r>
             <a:endParaRPr lang="en-US" sz="750" dirty="0"/>
           </a:p>
@@ -17573,7 +17573,7 @@
             </a:avLst>
           </a:prstGeom>
           <a:solidFill>
-            <a:srgbClr val="2E7D9A"/>
+            <a:srgbClr val="7A5C8E"/>
           </a:solidFill>
           <a:ln/>
         </p:spPr>
@@ -18226,7 +18226,7 @@
             </a:avLst>
           </a:prstGeom>
           <a:solidFill>
-            <a:srgbClr val="2E7D9A"/>
+            <a:srgbClr val="7A5C8E"/>
           </a:solidFill>
           <a:ln/>
         </p:spPr>
@@ -18465,7 +18465,7 @@
                 <a:ea typeface="Hanken Grotesk" pitchFamily="34" charset="-122"/>
                 <a:cs typeface="Hanken Grotesk" pitchFamily="34" charset="-120"/>
               </a:rPr>
-              <a:t>Reveal Math Grade 6  ·  Unit 2  ·  Lesson 2-1</a:t>
+              <a:t>Reveal Math Grade 6  ·  Unit 6  ·  Lesson 6-1</a:t>
             </a:r>
             <a:endParaRPr lang="en-US" sz="750" dirty="0"/>
           </a:p>
@@ -18761,7 +18761,7 @@
                           <a:ea typeface="Hanken Grotesk" pitchFamily="34" charset="-122"/>
                           <a:cs typeface="Hanken Grotesk" pitchFamily="34" charset="-120"/>
                         </a:rPr>
-                        <a:t>Dividend</a:t>
+                        <a:t>Division of Fractions</a:t>
                       </a:r>
                       <a:pPr indent="0" marL="0">
                         <a:buNone/>
@@ -18785,7 +18785,7 @@
                           <a:ea typeface="Hanken Grotesk" pitchFamily="34" charset="-122"/>
                           <a:cs typeface="Hanken Grotesk" pitchFamily="34" charset="-120"/>
                         </a:rPr>
-                        <a:t>Dividendo</a:t>
+                        <a:t>División de fracciones</a:t>
                       </a:r>
                       <a:endParaRPr lang="en-US" sz="950" dirty="0">
                         <a:latin typeface="Hanken Grotesk" charset="0"/>
@@ -18853,7 +18853,7 @@
                           <a:ea typeface="Hanken Grotesk" pitchFamily="34" charset="-122"/>
                           <a:cs typeface="Hanken Grotesk" pitchFamily="34" charset="-120"/>
                         </a:rPr>
-                        <a:t>The number you are splitting up in a division problem.</a:t>
+                        <a:t>Finding how many groups of one fraction fit inside another amount.</a:t>
                       </a:r>
                       <a:pPr indent="0" marL="0">
                         <a:buNone/>
@@ -18877,7 +18877,7 @@
                           <a:ea typeface="Hanken Grotesk" pitchFamily="34" charset="-122"/>
                           <a:cs typeface="Hanken Grotesk" pitchFamily="34" charset="-120"/>
                         </a:rPr>
-                        <a:t>El número que estás repartiendo en una división.</a:t>
+                        <a:t>Hallar cuántos grupos de una fracción caben dentro de otra cantidad.</a:t>
                       </a:r>
                       <a:endParaRPr lang="en-US" sz="900" dirty="0">
                         <a:latin typeface="Hanken Grotesk" charset="0"/>
@@ -18945,7 +18945,7 @@
                           <a:ea typeface="Hanken Grotesk" pitchFamily="34" charset="-122"/>
                           <a:cs typeface="Hanken Grotesk" pitchFamily="34" charset="-120"/>
                         </a:rPr>
-                        <a:t>In 3 ÷ 1/4 = 12, the dividend is 3 — it is the total being split</a:t>
+                        <a:t>3 ÷ 1/2 asks how many halves fit in 3; the answer is 6.</a:t>
                       </a:r>
                       <a:endParaRPr lang="en-US" sz="900" dirty="0">
                         <a:latin typeface="Hanken Grotesk" charset="0"/>
@@ -19015,7 +19015,7 @@
                           <a:ea typeface="Hanken Grotesk" pitchFamily="34" charset="-122"/>
                           <a:cs typeface="Hanken Grotesk" pitchFamily="34" charset="-120"/>
                         </a:rPr>
-                        <a:t>Divisor</a:t>
+                        <a:t>Reciprocal</a:t>
                       </a:r>
                       <a:pPr indent="0" marL="0">
                         <a:buNone/>
@@ -19039,7 +19039,7 @@
                           <a:ea typeface="Hanken Grotesk" pitchFamily="34" charset="-122"/>
                           <a:cs typeface="Hanken Grotesk" pitchFamily="34" charset="-120"/>
                         </a:rPr>
-                        <a:t>Divisor</a:t>
+                        <a:t>Recíproco</a:t>
                       </a:r>
                       <a:endParaRPr lang="en-US" sz="950" dirty="0">
                         <a:latin typeface="Hanken Grotesk" charset="0"/>
@@ -19107,7 +19107,7 @@
                           <a:ea typeface="Hanken Grotesk" pitchFamily="34" charset="-122"/>
                           <a:cs typeface="Hanken Grotesk" pitchFamily="34" charset="-120"/>
                         </a:rPr>
-                        <a:t>The number you split by in a division problem.</a:t>
+                        <a:t>A fraction turned upside down.</a:t>
                       </a:r>
                       <a:pPr indent="0" marL="0">
                         <a:buNone/>
@@ -19131,7 +19131,7 @@
                           <a:ea typeface="Hanken Grotesk" pitchFamily="34" charset="-122"/>
                           <a:cs typeface="Hanken Grotesk" pitchFamily="34" charset="-120"/>
                         </a:rPr>
-                        <a:t>El número entre el que divides en una división.</a:t>
+                        <a:t>Una fracción volteada de arriba abajo.</a:t>
                       </a:r>
                       <a:endParaRPr lang="en-US" sz="900" dirty="0">
                         <a:latin typeface="Hanken Grotesk" charset="0"/>
@@ -19199,7 +19199,7 @@
                           <a:ea typeface="Hanken Grotesk" pitchFamily="34" charset="-122"/>
                           <a:cs typeface="Hanken Grotesk" pitchFamily="34" charset="-120"/>
                         </a:rPr>
-                        <a:t>In 3 ÷ 1/4 = 12, the divisor is 1/4 — it is the size of each piece</a:t>
+                        <a:t>The reciprocal of 1/4 is 4/1 = 4. A whole number like 3 is 3/1, so its reciprocal is 1/3.</a:t>
                       </a:r>
                       <a:endParaRPr lang="en-US" sz="900" dirty="0">
                         <a:latin typeface="Hanken Grotesk" charset="0"/>
@@ -19523,7 +19523,7 @@
                           <a:ea typeface="Hanken Grotesk" pitchFamily="34" charset="-122"/>
                           <a:cs typeface="Hanken Grotesk" pitchFamily="34" charset="-120"/>
                         </a:rPr>
-                        <a:t>Reciprocal</a:t>
+                        <a:t>Dividend</a:t>
                       </a:r>
                       <a:pPr indent="0" marL="0">
                         <a:buNone/>
@@ -19547,7 +19547,7 @@
                           <a:ea typeface="Hanken Grotesk" pitchFamily="34" charset="-122"/>
                           <a:cs typeface="Hanken Grotesk" pitchFamily="34" charset="-120"/>
                         </a:rPr>
-                        <a:t>Recíproco</a:t>
+                        <a:t>Dividendo</a:t>
                       </a:r>
                       <a:endParaRPr lang="en-US" sz="950" dirty="0">
                         <a:latin typeface="Hanken Grotesk" charset="0"/>
@@ -19615,7 +19615,7 @@
                           <a:ea typeface="Hanken Grotesk" pitchFamily="34" charset="-122"/>
                           <a:cs typeface="Hanken Grotesk" pitchFamily="34" charset="-120"/>
                         </a:rPr>
-                        <a:t>A fraction turned upside down.</a:t>
+                        <a:t>The total number being divided into equal groups (the number inside the division bracket).</a:t>
                       </a:r>
                       <a:pPr indent="0" marL="0">
                         <a:buNone/>
@@ -19639,7 +19639,7 @@
                           <a:ea typeface="Hanken Grotesk" pitchFamily="34" charset="-122"/>
                           <a:cs typeface="Hanken Grotesk" pitchFamily="34" charset="-120"/>
                         </a:rPr>
-                        <a:t>Una fracción volteada de arriba abajo.</a:t>
+                        <a:t>El número total que se divide en partes iguales (el número dentro de la casilla de división).</a:t>
                       </a:r>
                       <a:endParaRPr lang="en-US" sz="900" dirty="0">
                         <a:latin typeface="Hanken Grotesk" charset="0"/>
@@ -19707,7 +19707,7 @@
                           <a:ea typeface="Hanken Grotesk" pitchFamily="34" charset="-122"/>
                           <a:cs typeface="Hanken Grotesk" pitchFamily="34" charset="-120"/>
                         </a:rPr>
-                        <a:t>The reciprocal of 1/4 is 4/1 = 4. Multiplying by the reciprocal gives the same result as dividing.</a:t>
+                        <a:t>In 3 ÷ 1/4 = 12, the dividend is 3 — it is the total being split</a:t>
                       </a:r>
                       <a:endParaRPr lang="en-US" sz="900" dirty="0">
                         <a:latin typeface="Hanken Grotesk" charset="0"/>
@@ -19777,7 +19777,7 @@
                           <a:ea typeface="Hanken Grotesk" pitchFamily="34" charset="-122"/>
                           <a:cs typeface="Hanken Grotesk" pitchFamily="34" charset="-120"/>
                         </a:rPr>
-                        <a:t>Unit fraction</a:t>
+                        <a:t>Divisor</a:t>
                       </a:r>
                       <a:pPr indent="0" marL="0">
                         <a:buNone/>
@@ -19801,7 +19801,7 @@
                           <a:ea typeface="Hanken Grotesk" pitchFamily="34" charset="-122"/>
                           <a:cs typeface="Hanken Grotesk" pitchFamily="34" charset="-120"/>
                         </a:rPr>
-                        <a:t>Fracción unitaria</a:t>
+                        <a:t>Divisor</a:t>
                       </a:r>
                       <a:endParaRPr lang="en-US" sz="950" dirty="0">
                         <a:latin typeface="Hanken Grotesk" charset="0"/>
@@ -19869,7 +19869,7 @@
                           <a:ea typeface="Hanken Grotesk" pitchFamily="34" charset="-122"/>
                           <a:cs typeface="Hanken Grotesk" pitchFamily="34" charset="-120"/>
                         </a:rPr>
-                        <a:t>A fraction with 1 on top, like 1/4.</a:t>
+                        <a:t>The number of equal groups you are dividing into (the number outside the division bracket).</a:t>
                       </a:r>
                       <a:pPr indent="0" marL="0">
                         <a:buNone/>
@@ -19893,7 +19893,7 @@
                           <a:ea typeface="Hanken Grotesk" pitchFamily="34" charset="-122"/>
                           <a:cs typeface="Hanken Grotesk" pitchFamily="34" charset="-120"/>
                         </a:rPr>
-                        <a:t>Una fracción con 1 arriba, como 1/4.</a:t>
+                        <a:t>El número de partes iguales en las que divides (el número fuera de la casilla de división).</a:t>
                       </a:r>
                       <a:endParaRPr lang="en-US" sz="900" dirty="0">
                         <a:latin typeface="Hanken Grotesk" charset="0"/>
@@ -19961,7 +19961,7 @@
                           <a:ea typeface="Hanken Grotesk" pitchFamily="34" charset="-122"/>
                           <a:cs typeface="Hanken Grotesk" pitchFamily="34" charset="-120"/>
                         </a:rPr>
-                        <a:t>1/2, 1/3, 1/4, 1/5 — each represents one equal part of a whole</a:t>
+                        <a:t>In 3 ÷ 1/4 = 12, the divisor is 1/4 — it is the size of each piece</a:t>
                       </a:r>
                       <a:endParaRPr lang="en-US" sz="900" dirty="0">
                         <a:latin typeface="Hanken Grotesk" charset="0"/>
@@ -20050,7 +20050,7 @@
                 <a:ea typeface="Outfit" pitchFamily="34" charset="-122"/>
                 <a:cs typeface="Outfit" pitchFamily="34" charset="-120"/>
               </a:rPr>
-              <a:t>Reciprocal — example vs. non-example:</a:t>
+              <a:t>Division of Fractions — example vs. non-example:</a:t>
             </a:r>
             <a:endParaRPr lang="en-US" sz="950" dirty="0"/>
           </a:p>
@@ -20137,7 +20137,7 @@
                 <a:ea typeface="Hanken Grotesk" pitchFamily="34" charset="-122"/>
                 <a:cs typeface="Hanken Grotesk" pitchFamily="34" charset="-120"/>
               </a:rPr>
-              <a:t>The reciprocal of 3/4 is 4/3  </a:t>
+              <a:t>9 ÷ 1/4 = 36 quarter-foot pieces  </a:t>
             </a:r>
             <a:pPr indent="0" marL="0">
               <a:buNone/>
@@ -20151,7 +20151,7 @@
                 <a:ea typeface="Hanken Grotesk" pitchFamily="34" charset="-122"/>
                 <a:cs typeface="Hanken Grotesk" pitchFamily="34" charset="-120"/>
               </a:rPr>
-              <a:t>Flipping 3/4 gives 4/3.</a:t>
+              <a:t>It counts the groups that fit.</a:t>
             </a:r>
             <a:endParaRPr lang="en-US" sz="900" dirty="0"/>
           </a:p>
@@ -20238,7 +20238,7 @@
                 <a:ea typeface="Hanken Grotesk" pitchFamily="34" charset="-122"/>
                 <a:cs typeface="Hanken Grotesk" pitchFamily="34" charset="-120"/>
               </a:rPr>
-              <a:t>The reciprocal of 3/4 is 3/4  </a:t>
+              <a:t>9 × 1/4 = 2.25  </a:t>
             </a:r>
             <a:pPr indent="0" marL="0">
               <a:buNone/>
@@ -20252,7 +20252,7 @@
                 <a:ea typeface="Hanken Grotesk" pitchFamily="34" charset="-122"/>
                 <a:cs typeface="Hanken Grotesk" pitchFamily="34" charset="-120"/>
               </a:rPr>
-              <a:t>The reciprocal flips the fraction; it is not the same fraction.</a:t>
+              <a:t>Multiplying takes a part instead of counting groups.</a:t>
             </a:r>
             <a:endParaRPr lang="en-US" sz="900" dirty="0"/>
           </a:p>
@@ -20405,7 +20405,7 @@
             </a:avLst>
           </a:prstGeom>
           <a:solidFill>
-            <a:srgbClr val="2E7D9A"/>
+            <a:srgbClr val="7A5C8E"/>
           </a:solidFill>
           <a:ln/>
         </p:spPr>
@@ -20644,7 +20644,7 @@
                 <a:ea typeface="Hanken Grotesk" pitchFamily="34" charset="-122"/>
                 <a:cs typeface="Hanken Grotesk" pitchFamily="34" charset="-120"/>
               </a:rPr>
-              <a:t>Reveal Math Grade 6  ·  Unit 2  ·  Lesson 2-1</a:t>
+              <a:t>Reveal Math Grade 6  ·  Unit 6  ·  Lesson 6-1</a:t>
             </a:r>
             <a:endParaRPr lang="en-US" sz="750" dirty="0"/>
           </a:p>
@@ -20740,7 +20740,7 @@
             </a:avLst>
           </a:prstGeom>
           <a:solidFill>
-            <a:srgbClr val="2E7D9A"/>
+            <a:srgbClr val="7A5C8E"/>
           </a:solidFill>
           <a:ln/>
         </p:spPr>
@@ -20820,7 +20820,7 @@
             <a:avLst/>
           </a:prstGeom>
           <a:solidFill>
-            <a:srgbClr val="2E7D9A"/>
+            <a:srgbClr val="7A5C8E"/>
           </a:solidFill>
           <a:ln/>
         </p:spPr>
@@ -20897,7 +20897,7 @@
                 <a:ea typeface="Hanken Grotesk" pitchFamily="34" charset="-122"/>
                 <a:cs typeface="Hanken Grotesk" pitchFamily="34" charset="-120"/>
               </a:rPr>
-              <a:t>Let's try 2 ÷ 1/3. How many 1/3-size pieces fit into 2?</a:t>
+              <a:t>Let's try 2 ÷ 1/3. The bar model counted 6 thirds inside 2 wholes — now we get there with the steps.</a:t>
             </a:r>
             <a:endParaRPr lang="en-US" sz="1050" dirty="0"/>
           </a:p>
@@ -20918,7 +20918,7 @@
             <a:avLst/>
           </a:prstGeom>
           <a:solidFill>
-            <a:srgbClr val="2E7D9A"/>
+            <a:srgbClr val="7A5C8E"/>
           </a:solidFill>
           <a:ln/>
         </p:spPr>
@@ -20995,7 +20995,7 @@
                 <a:ea typeface="Hanken Grotesk" pitchFamily="34" charset="-122"/>
                 <a:cs typeface="Hanken Grotesk" pitchFamily="34" charset="-120"/>
               </a:rPr>
-              <a:t>How many thirds are in 1 whole? Three.</a:t>
+              <a:t>Step 1: put a 1 under the whole number. 2 becomes 2/1, so we have 2/1 ÷ 1/3.</a:t>
             </a:r>
             <a:endParaRPr lang="en-US" sz="1050" dirty="0"/>
           </a:p>
@@ -21016,7 +21016,7 @@
             <a:avLst/>
           </a:prstGeom>
           <a:solidFill>
-            <a:srgbClr val="2E7D9A"/>
+            <a:srgbClr val="7A5C8E"/>
           </a:solidFill>
           <a:ln/>
         </p:spPr>
@@ -21093,7 +21093,7 @@
                 <a:ea typeface="Hanken Grotesk" pitchFamily="34" charset="-122"/>
                 <a:cs typeface="Hanken Grotesk" pitchFamily="34" charset="-120"/>
               </a:rPr>
-              <a:t>We have 2 wholes, so 2 × 3 = 6. That means 2 ÷ 1/3 = 6.</a:t>
+              <a:t>Step 2: Keep, Change, Flip. Keep 2/1, change ÷ to ×, flip 1/3 to 3/1. That gives 2/1 × 3/1.</a:t>
             </a:r>
             <a:endParaRPr lang="en-US" sz="1050" dirty="0"/>
           </a:p>
@@ -21101,14 +21101,34 @@
       </p:sp>
       <p:sp>
         <p:nvSpPr>
-          <p:cNvPr id="29" name="Text 27"/>
-          <p:cNvSpPr/>
-          <p:nvPr/>
-        </p:nvSpPr>
-        <p:spPr>
-          <a:xfrm>
-            <a:off x="594360" y="3886200"/>
-            <a:ext cx="5120640" cy="228600"/>
+          <p:cNvPr id="29" name="Shape 27"/>
+          <p:cNvSpPr/>
+          <p:nvPr/>
+        </p:nvSpPr>
+        <p:spPr>
+          <a:xfrm>
+            <a:off x="640080" y="3035808"/>
+            <a:ext cx="274320" cy="274320"/>
+          </a:xfrm>
+          <a:prstGeom prst="ellipse">
+            <a:avLst/>
+          </a:prstGeom>
+          <a:solidFill>
+            <a:srgbClr val="7A5C8E"/>
+          </a:solidFill>
+          <a:ln/>
+        </p:spPr>
+      </p:sp>
+      <p:sp>
+        <p:nvSpPr>
+          <p:cNvPr id="30" name="Text 28"/>
+          <p:cNvSpPr/>
+          <p:nvPr/>
+        </p:nvSpPr>
+        <p:spPr>
+          <a:xfrm>
+            <a:off x="640080" y="3035808"/>
+            <a:ext cx="274320" cy="274320"/>
           </a:xfrm>
           <a:prstGeom prst="rect">
             <a:avLst/>
@@ -21120,18 +21140,96 @@
           <a:bodyPr wrap="square" rtlCol="0" anchor="ctr"/>
           <a:lstStyle/>
           <a:p>
+            <a:pPr algn="ctr" indent="0" marL="0">
+              <a:buNone/>
+            </a:pPr>
+            <a:r>
+              <a:rPr lang="en-US" sz="1100" b="1" dirty="0">
+                <a:solidFill>
+                  <a:srgbClr val="FFFFFF"/>
+                </a:solidFill>
+                <a:latin typeface="Outfit" pitchFamily="34" charset="0"/>
+                <a:ea typeface="Outfit" pitchFamily="34" charset="-122"/>
+                <a:cs typeface="Outfit" pitchFamily="34" charset="-120"/>
+              </a:rPr>
+              <a:t>4</a:t>
+            </a:r>
+            <a:endParaRPr lang="en-US" sz="1100" dirty="0"/>
+          </a:p>
+        </p:txBody>
+      </p:sp>
+      <p:sp>
+        <p:nvSpPr>
+          <p:cNvPr id="31" name="Text 29"/>
+          <p:cNvSpPr/>
+          <p:nvPr/>
+        </p:nvSpPr>
+        <p:spPr>
+          <a:xfrm>
+            <a:off x="1024128" y="2980944"/>
+            <a:ext cx="4828032" cy="420624"/>
+          </a:xfrm>
+          <a:prstGeom prst="rect">
+            <a:avLst/>
+          </a:prstGeom>
+          <a:noFill/>
+          <a:ln/>
+        </p:spPr>
+        <p:txBody>
+          <a:bodyPr wrap="square" rtlCol="0" anchor="ctr"/>
+          <a:lstStyle/>
+          <a:p>
             <a:pPr indent="0" marL="0">
               <a:buNone/>
             </a:pPr>
             <a:r>
-              <a:rPr lang="en-US" sz="900" i="1" dirty="0">
-                <a:solidFill>
-                  <a:srgbClr val="8A96A3"/>
+              <a:rPr lang="en-US" sz="1050" dirty="0">
+                <a:solidFill>
+                  <a:srgbClr val="24323F"/>
                 </a:solidFill>
                 <a:latin typeface="Hanken Grotesk" pitchFamily="34" charset="0"/>
                 <a:ea typeface="Hanken Grotesk" pitchFamily="34" charset="-122"/>
                 <a:cs typeface="Hanken Grotesk" pitchFamily="34" charset="-120"/>
               </a:rPr>
+              <a:t>Step 3: multiply across. 2 × 3 = 6 on top and 1 × 1 = 1 on the bottom, so 2 ÷ 1/3 = 6 — exactly what we counted on the bars.</a:t>
+            </a:r>
+            <a:endParaRPr lang="en-US" sz="1050" dirty="0"/>
+          </a:p>
+        </p:txBody>
+      </p:sp>
+      <p:sp>
+        <p:nvSpPr>
+          <p:cNvPr id="32" name="Text 30"/>
+          <p:cNvSpPr/>
+          <p:nvPr/>
+        </p:nvSpPr>
+        <p:spPr>
+          <a:xfrm>
+            <a:off x="594360" y="3886200"/>
+            <a:ext cx="5120640" cy="228600"/>
+          </a:xfrm>
+          <a:prstGeom prst="rect">
+            <a:avLst/>
+          </a:prstGeom>
+          <a:noFill/>
+          <a:ln/>
+        </p:spPr>
+        <p:txBody>
+          <a:bodyPr wrap="square" rtlCol="0" anchor="ctr"/>
+          <a:lstStyle/>
+          <a:p>
+            <a:pPr indent="0" marL="0">
+              <a:buNone/>
+            </a:pPr>
+            <a:r>
+              <a:rPr lang="en-US" sz="900" i="1" dirty="0">
+                <a:solidFill>
+                  <a:srgbClr val="8A96A3"/>
+                </a:solidFill>
+                <a:latin typeface="Hanken Grotesk" pitchFamily="34" charset="0"/>
+                <a:ea typeface="Hanken Grotesk" pitchFamily="34" charset="-122"/>
+                <a:cs typeface="Hanken Grotesk" pitchFamily="34" charset="-120"/>
+              </a:rPr>
               <a:t>Your turn — show your work:</a:t>
             </a:r>
             <a:endParaRPr lang="en-US" sz="900" dirty="0"/>
@@ -21140,7 +21238,7 @@
       </p:sp>
       <p:sp>
         <p:nvSpPr>
-          <p:cNvPr id="30" name="Shape 28"/>
+          <p:cNvPr id="33" name="Shape 31"/>
           <p:cNvSpPr/>
           <p:nvPr/>
         </p:nvSpPr>
@@ -21163,7 +21261,7 @@
       </p:sp>
       <p:sp>
         <p:nvSpPr>
-          <p:cNvPr id="31" name="Shape 29"/>
+          <p:cNvPr id="34" name="Shape 32"/>
           <p:cNvSpPr/>
           <p:nvPr/>
         </p:nvSpPr>
@@ -21197,7 +21295,7 @@
       </p:sp>
       <p:sp>
         <p:nvSpPr>
-          <p:cNvPr id="32" name="Text 30"/>
+          <p:cNvPr id="35" name="Text 33"/>
           <p:cNvSpPr/>
           <p:nvPr/>
         </p:nvSpPr>
@@ -21238,7 +21336,7 @@
       </p:sp>
       <p:sp>
         <p:nvSpPr>
-          <p:cNvPr id="33" name="Text 31"/>
+          <p:cNvPr id="36" name="Text 34"/>
           <p:cNvSpPr/>
           <p:nvPr/>
         </p:nvSpPr>
@@ -21277,7 +21375,7 @@
       </p:sp>
       <p:sp>
         <p:nvSpPr>
-          <p:cNvPr id="34" name="Shape 32"/>
+          <p:cNvPr id="37" name="Shape 35"/>
           <p:cNvSpPr/>
           <p:nvPr/>
         </p:nvSpPr>
@@ -21311,7 +21409,7 @@
       </p:sp>
       <p:sp>
         <p:nvSpPr>
-          <p:cNvPr id="35" name="Text 33"/>
+          <p:cNvPr id="38" name="Text 36"/>
           <p:cNvSpPr/>
           <p:nvPr/>
         </p:nvSpPr>
@@ -21336,7 +21434,7 @@
             <a:r>
               <a:rPr lang="en-US" sz="950" b="1" dirty="0">
                 <a:solidFill>
-                  <a:srgbClr val="2E7D9A"/>
+                  <a:srgbClr val="7A5C8E"/>
                 </a:solidFill>
                 <a:latin typeface="Outfit" pitchFamily="34" charset="0"/>
                 <a:ea typeface="Outfit" pitchFamily="34" charset="-122"/>
@@ -21350,7 +21448,7 @@
       </p:sp>
       <p:sp>
         <p:nvSpPr>
-          <p:cNvPr id="36" name="Text 34"/>
+          <p:cNvPr id="39" name="Text 37"/>
           <p:cNvSpPr/>
           <p:nvPr/>
         </p:nvSpPr>
@@ -21381,7 +21479,7 @@
                 <a:ea typeface="Hanken Grotesk" pitchFamily="34" charset="-122"/>
                 <a:cs typeface="Hanken Grotesk" pitchFamily="34" charset="-120"/>
               </a:rPr>
-              <a:t>Dividing by a fraction smaller than 1 gives an answer BIGGER than what you started with, because many tiny pieces fit inside.</a:t>
+              <a:t>Dividing Whole Numbers &amp; Fractions. 1. Put a 1 under the whole number: 3 ÷ 1/4 = 3/1 ÷ 1/4. 2. Keep, Change, Flip: 3/1 ÷ 1/4 = 3/1 × 4/1. 3. Multiply across: 3/1 × 4/1 = 12/1 = 12</a:t>
             </a:r>
             <a:endParaRPr lang="en-US" sz="950" dirty="0"/>
           </a:p>
